--- a/Documentos/Entrega 2/Inovação e Empreendedorismo/BMC_Arkanis.pptx
+++ b/Documentos/Entrega 2/Inovação e Empreendedorismo/BMC_Arkanis.pptx
@@ -5,12 +5,10 @@
     <p:sldMasterId id="2147483648" r:id="rId1"/>
   </p:sldMasterIdLst>
   <p:notesMasterIdLst>
-    <p:notesMasterId r:id="rId5"/>
+    <p:notesMasterId r:id="rId3"/>
   </p:notesMasterIdLst>
   <p:sldIdLst>
     <p:sldId id="257" r:id="rId2"/>
-    <p:sldId id="259" r:id="rId3"/>
-    <p:sldId id="260" r:id="rId4"/>
   </p:sldIdLst>
   <p:sldSz cx="9144000" cy="5143500" type="screen16x9"/>
   <p:notesSz cx="5143500" cy="9144000"/>
@@ -323,174 +321,6 @@
 </p:notes>
 </file>
 
-<file path=ppt/notesSlides/notesSlide2.xml><?xml version="1.0" encoding="utf-8"?>
-<p:notes xmlns:a="http://schemas.openxmlformats.org/drawingml/2006/main" xmlns:r="http://schemas.openxmlformats.org/officeDocument/2006/relationships" xmlns:p="http://schemas.openxmlformats.org/presentationml/2006/main">
-  <p:cSld>
-    <p:spTree>
-      <p:nvGrpSpPr>
-        <p:cNvPr id="1" name=""/>
-        <p:cNvGrpSpPr/>
-        <p:nvPr/>
-      </p:nvGrpSpPr>
-      <p:grpSpPr>
-        <a:xfrm>
-          <a:off x="0" y="0"/>
-          <a:ext cx="0" cy="0"/>
-          <a:chOff x="0" y="0"/>
-          <a:chExt cx="0" cy="0"/>
-        </a:xfrm>
-      </p:grpSpPr>
-      <p:sp>
-        <p:nvSpPr>
-          <p:cNvPr id="2" name="Slide Image Placeholder 1"/>
-          <p:cNvSpPr>
-            <a:spLocks noGrp="1" noRot="1" noChangeAspect="1"/>
-          </p:cNvSpPr>
-          <p:nvPr>
-            <p:ph type="sldImg"/>
-          </p:nvPr>
-        </p:nvSpPr>
-        <p:spPr/>
-      </p:sp>
-      <p:sp>
-        <p:nvSpPr>
-          <p:cNvPr id="3" name="Notes Placeholder 2"/>
-          <p:cNvSpPr>
-            <a:spLocks noGrp="1"/>
-          </p:cNvSpPr>
-          <p:nvPr>
-            <p:ph type="body" idx="1"/>
-          </p:nvPr>
-        </p:nvSpPr>
-        <p:spPr/>
-        <p:txBody>
-          <a:bodyPr/>
-          <a:lstStyle/>
-          <a:p>
-            <a:endParaRPr lang="en-US" dirty="0"/>
-          </a:p>
-        </p:txBody>
-      </p:sp>
-      <p:sp>
-        <p:nvSpPr>
-          <p:cNvPr id="4" name="Slide Number Placeholder 3"/>
-          <p:cNvSpPr>
-            <a:spLocks noGrp="1"/>
-          </p:cNvSpPr>
-          <p:nvPr>
-            <p:ph type="sldNum" sz="quarter" idx="10"/>
-          </p:nvPr>
-        </p:nvSpPr>
-        <p:spPr/>
-        <p:txBody>
-          <a:bodyPr/>
-          <a:lstStyle/>
-          <a:p>
-            <a:fld id="{F7021451-1387-4CA6-816F-3879F97B5CBC}" type="slidenum">
-              <a:rPr lang="en-US"/>
-              <a:t>2</a:t>
-            </a:fld>
-            <a:endParaRPr lang="en-US"/>
-          </a:p>
-        </p:txBody>
-      </p:sp>
-    </p:spTree>
-    <p:extLst>
-      <p:ext uri="{BB962C8B-B14F-4D97-AF65-F5344CB8AC3E}">
-        <p14:creationId xmlns:p14="http://schemas.microsoft.com/office/powerpoint/2010/main" val="1024086991"/>
-      </p:ext>
-    </p:extLst>
-  </p:cSld>
-  <p:clrMapOvr>
-    <a:masterClrMapping/>
-  </p:clrMapOvr>
-</p:notes>
-</file>
-
-<file path=ppt/notesSlides/notesSlide3.xml><?xml version="1.0" encoding="utf-8"?>
-<p:notes xmlns:a="http://schemas.openxmlformats.org/drawingml/2006/main" xmlns:r="http://schemas.openxmlformats.org/officeDocument/2006/relationships" xmlns:p="http://schemas.openxmlformats.org/presentationml/2006/main">
-  <p:cSld>
-    <p:spTree>
-      <p:nvGrpSpPr>
-        <p:cNvPr id="1" name=""/>
-        <p:cNvGrpSpPr/>
-        <p:nvPr/>
-      </p:nvGrpSpPr>
-      <p:grpSpPr>
-        <a:xfrm>
-          <a:off x="0" y="0"/>
-          <a:ext cx="0" cy="0"/>
-          <a:chOff x="0" y="0"/>
-          <a:chExt cx="0" cy="0"/>
-        </a:xfrm>
-      </p:grpSpPr>
-      <p:sp>
-        <p:nvSpPr>
-          <p:cNvPr id="2" name="Slide Image Placeholder 1"/>
-          <p:cNvSpPr>
-            <a:spLocks noGrp="1" noRot="1" noChangeAspect="1"/>
-          </p:cNvSpPr>
-          <p:nvPr>
-            <p:ph type="sldImg"/>
-          </p:nvPr>
-        </p:nvSpPr>
-        <p:spPr/>
-      </p:sp>
-      <p:sp>
-        <p:nvSpPr>
-          <p:cNvPr id="3" name="Notes Placeholder 2"/>
-          <p:cNvSpPr>
-            <a:spLocks noGrp="1"/>
-          </p:cNvSpPr>
-          <p:nvPr>
-            <p:ph type="body" idx="1"/>
-          </p:nvPr>
-        </p:nvSpPr>
-        <p:spPr/>
-        <p:txBody>
-          <a:bodyPr/>
-          <a:lstStyle/>
-          <a:p>
-            <a:endParaRPr lang="en-US" dirty="0"/>
-          </a:p>
-        </p:txBody>
-      </p:sp>
-      <p:sp>
-        <p:nvSpPr>
-          <p:cNvPr id="4" name="Slide Number Placeholder 3"/>
-          <p:cNvSpPr>
-            <a:spLocks noGrp="1"/>
-          </p:cNvSpPr>
-          <p:nvPr>
-            <p:ph type="sldNum" sz="quarter" idx="10"/>
-          </p:nvPr>
-        </p:nvSpPr>
-        <p:spPr/>
-        <p:txBody>
-          <a:bodyPr/>
-          <a:lstStyle/>
-          <a:p>
-            <a:fld id="{F7021451-1387-4CA6-816F-3879F97B5CBC}" type="slidenum">
-              <a:rPr lang="en-US"/>
-              <a:t>3</a:t>
-            </a:fld>
-            <a:endParaRPr lang="en-US"/>
-          </a:p>
-        </p:txBody>
-      </p:sp>
-    </p:spTree>
-    <p:extLst>
-      <p:ext uri="{BB962C8B-B14F-4D97-AF65-F5344CB8AC3E}">
-        <p14:creationId xmlns:p14="http://schemas.microsoft.com/office/powerpoint/2010/main" val="1024086991"/>
-      </p:ext>
-    </p:extLst>
-  </p:cSld>
-  <p:clrMapOvr>
-    <a:masterClrMapping/>
-  </p:clrMapOvr>
-</p:notes>
-</file>
-
 <file path=ppt/slideLayouts/slideLayout1.xml><?xml version="1.0" encoding="utf-8"?>
 <p:sldLayout xmlns:a="http://schemas.openxmlformats.org/drawingml/2006/main" xmlns:r="http://schemas.openxmlformats.org/officeDocument/2006/relationships" xmlns:p="http://schemas.openxmlformats.org/presentationml/2006/main" preserve="1">
   <p:cSld name="DEFAULT">
@@ -1010,7 +840,7 @@
         </p:nvSpPr>
         <p:spPr>
           <a:xfrm>
-            <a:off x="128016" y="786384"/>
+            <a:off x="128016" y="702818"/>
             <a:ext cx="1600200" cy="0"/>
           </a:xfrm>
           <a:prstGeom prst="line">
@@ -1080,9 +910,19 @@
                 <a:ea typeface="Calibri" pitchFamily="34" charset="-122"/>
                 <a:cs typeface="Calibri" pitchFamily="34" charset="-120"/>
               </a:rPr>
-              <a:t> arbitragem de custo</a:t>
-            </a:r>
-            <a:endParaRPr lang="en-US" sz="750" dirty="0"/>
+              <a:t> </a:t>
+            </a:r>
+            <a:r>
+              <a:rPr lang="pt-BR" sz="750" dirty="0">
+                <a:solidFill>
+                  <a:srgbClr val="4A5568"/>
+                </a:solidFill>
+                <a:latin typeface="Calibri" pitchFamily="34" charset="0"/>
+                <a:ea typeface="Calibri" pitchFamily="34" charset="-122"/>
+                <a:cs typeface="Calibri" pitchFamily="34" charset="-120"/>
+              </a:rPr>
+              <a:t>Compras em volume de componentes ESP32 para garantir baixo custo unitário.</a:t>
+            </a:r>
           </a:p>
           <a:p>
             <a:pPr marL="342900" indent="-342900">
@@ -1093,6 +933,17 @@
               <a:buChar char="•"/>
             </a:pPr>
             <a:r>
+              <a:rPr lang="en-US" sz="750" b="1" dirty="0" err="1">
+                <a:solidFill>
+                  <a:srgbClr val="4A5568"/>
+                </a:solidFill>
+                <a:latin typeface="Calibri" pitchFamily="34" charset="0"/>
+                <a:ea typeface="Calibri" pitchFamily="34" charset="-122"/>
+                <a:cs typeface="Calibri" pitchFamily="34" charset="-120"/>
+              </a:rPr>
+              <a:t>Corretoras</a:t>
+            </a:r>
+            <a:r>
               <a:rPr lang="en-US" sz="750" b="1" dirty="0">
                 <a:solidFill>
                   <a:srgbClr val="4A5568"/>
@@ -1101,7 +952,7 @@
                 <a:ea typeface="Calibri" pitchFamily="34" charset="-122"/>
                 <a:cs typeface="Calibri" pitchFamily="34" charset="-120"/>
               </a:rPr>
-              <a:t>Corretoras de </a:t>
+              <a:t> de </a:t>
             </a:r>
             <a:r>
               <a:rPr lang="en-US" sz="750" b="1" dirty="0" err="1">
@@ -1126,17 +977,16 @@
               <a:t> </a:t>
             </a:r>
             <a:r>
-              <a:rPr lang="en-US" sz="750" dirty="0">
-                <a:solidFill>
-                  <a:srgbClr val="4A5568"/>
-                </a:solidFill>
-                <a:latin typeface="Calibri" pitchFamily="34" charset="0"/>
-                <a:ea typeface="Calibri" pitchFamily="34" charset="-122"/>
-                <a:cs typeface="Calibri" pitchFamily="34" charset="-120"/>
-              </a:rPr>
-              <a:t>exigem ou concedem descontos pela instalação da Arkanis</a:t>
-            </a:r>
-            <a:endParaRPr lang="en-US" sz="750" dirty="0"/>
+              <a:rPr lang="pt-BR" sz="750" dirty="0">
+                <a:solidFill>
+                  <a:srgbClr val="4A5568"/>
+                </a:solidFill>
+                <a:latin typeface="Calibri" pitchFamily="34" charset="0"/>
+                <a:ea typeface="Calibri" pitchFamily="34" charset="-122"/>
+                <a:cs typeface="Calibri" pitchFamily="34" charset="-120"/>
+              </a:rPr>
+              <a:t>Atuam como prescritores técnicos que validam a redução de risco para as apólices.</a:t>
+            </a:r>
           </a:p>
           <a:p>
             <a:pPr marL="342900" indent="-342900">
@@ -1147,6 +997,17 @@
               <a:buChar char="•"/>
             </a:pPr>
             <a:r>
+              <a:rPr lang="en-US" sz="750" b="1" dirty="0" err="1">
+                <a:solidFill>
+                  <a:srgbClr val="4A5568"/>
+                </a:solidFill>
+                <a:latin typeface="Calibri" pitchFamily="34" charset="0"/>
+                <a:ea typeface="Calibri" pitchFamily="34" charset="-122"/>
+                <a:cs typeface="Calibri" pitchFamily="34" charset="-120"/>
+              </a:rPr>
+              <a:t>Universidades</a:t>
+            </a:r>
+            <a:r>
               <a:rPr lang="en-US" sz="750" b="1" dirty="0">
                 <a:solidFill>
                   <a:srgbClr val="4A5568"/>
@@ -1155,7 +1016,7 @@
                 <a:ea typeface="Calibri" pitchFamily="34" charset="-122"/>
                 <a:cs typeface="Calibri" pitchFamily="34" charset="-120"/>
               </a:rPr>
-              <a:t>Universidades / FECAP</a:t>
+              <a:t> / FECAP</a:t>
             </a:r>
             <a:r>
               <a:rPr lang="en-US" sz="750" dirty="0">
@@ -1169,26 +1030,15 @@
               <a:t> </a:t>
             </a:r>
             <a:r>
-              <a:rPr lang="en-US" sz="750" dirty="0" err="1">
-                <a:solidFill>
-                  <a:srgbClr val="4A5568"/>
-                </a:solidFill>
-                <a:latin typeface="Calibri" pitchFamily="34" charset="0"/>
-                <a:ea typeface="Calibri" pitchFamily="34" charset="-122"/>
-                <a:cs typeface="Calibri" pitchFamily="34" charset="-120"/>
-              </a:rPr>
-              <a:t>pilotos</a:t>
-            </a:r>
-            <a:r>
-              <a:rPr lang="en-US" sz="750" dirty="0">
-                <a:solidFill>
-                  <a:srgbClr val="4A5568"/>
-                </a:solidFill>
-                <a:latin typeface="Calibri" pitchFamily="34" charset="0"/>
-                <a:ea typeface="Calibri" pitchFamily="34" charset="-122"/>
-                <a:cs typeface="Calibri" pitchFamily="34" charset="-120"/>
-              </a:rPr>
-              <a:t> gratuitos para prova social e credibilidade governamental</a:t>
+              <a:rPr lang="pt-BR" sz="750" dirty="0">
+                <a:solidFill>
+                  <a:srgbClr val="4A5568"/>
+                </a:solidFill>
+                <a:latin typeface="Calibri" pitchFamily="34" charset="0"/>
+                <a:ea typeface="Calibri" pitchFamily="34" charset="-122"/>
+                <a:cs typeface="Calibri" pitchFamily="34" charset="-120"/>
+              </a:rPr>
+              <a:t>Parceria para validação técnica e rodagem de projetos piloto (B2B/B2G).</a:t>
             </a:r>
             <a:endParaRPr lang="en-US" sz="750" dirty="0"/>
           </a:p>
@@ -1305,7 +1155,7 @@
         </p:nvSpPr>
         <p:spPr>
           <a:xfrm>
-            <a:off x="1965960" y="786384"/>
+            <a:off x="1965960" y="703834"/>
             <a:ext cx="1600200" cy="0"/>
           </a:xfrm>
           <a:prstGeom prst="line">
@@ -1502,7 +1352,7 @@
         </p:nvSpPr>
         <p:spPr>
           <a:xfrm>
-            <a:off x="1965960" y="1810512"/>
+            <a:off x="1965960" y="1727962"/>
             <a:ext cx="1600200" cy="0"/>
           </a:xfrm>
           <a:prstGeom prst="line">
@@ -1830,7 +1680,7 @@
         </p:nvSpPr>
         <p:spPr>
           <a:xfrm>
-            <a:off x="3803904" y="786384"/>
+            <a:off x="3803904" y="703834"/>
             <a:ext cx="1691640" cy="0"/>
           </a:xfrm>
           <a:prstGeom prst="line">
@@ -1944,15 +1794,26 @@
               <a:buChar char="•"/>
             </a:pPr>
             <a:r>
-              <a:rPr lang="en-US" sz="750" dirty="0">
-                <a:solidFill>
-                  <a:srgbClr val="4A5568"/>
-                </a:solidFill>
-                <a:latin typeface="Calibri" pitchFamily="34" charset="0"/>
-                <a:ea typeface="Calibri" pitchFamily="34" charset="-122"/>
-                <a:cs typeface="Calibri" pitchFamily="34" charset="-120"/>
-              </a:rPr>
-              <a:t>Lock-in pelo histórico de dados exigido pelo seguro patrimonial</a:t>
+              <a:rPr lang="pt-BR" sz="750" dirty="0" err="1">
+                <a:solidFill>
+                  <a:srgbClr val="4A5568"/>
+                </a:solidFill>
+                <a:latin typeface="Calibri" pitchFamily="34" charset="0"/>
+                <a:ea typeface="Calibri" pitchFamily="34" charset="-122"/>
+                <a:cs typeface="Calibri" pitchFamily="34" charset="-120"/>
+              </a:rPr>
+              <a:t>Compliance</a:t>
+            </a:r>
+            <a:r>
+              <a:rPr lang="pt-BR" sz="750" dirty="0">
+                <a:solidFill>
+                  <a:srgbClr val="4A5568"/>
+                </a:solidFill>
+                <a:latin typeface="Calibri" pitchFamily="34" charset="0"/>
+                <a:ea typeface="Calibri" pitchFamily="34" charset="-122"/>
+                <a:cs typeface="Calibri" pitchFamily="34" charset="-120"/>
+              </a:rPr>
+              <a:t> Jurídico Geração de laudos técnicos automatizados baseados na norma EN 15757.</a:t>
             </a:r>
             <a:endParaRPr lang="en-US" sz="750" dirty="0"/>
           </a:p>
@@ -2069,7 +1930,7 @@
         </p:nvSpPr>
         <p:spPr>
           <a:xfrm>
-            <a:off x="5733288" y="786384"/>
+            <a:off x="5733288" y="728218"/>
             <a:ext cx="1234440" cy="0"/>
           </a:xfrm>
           <a:prstGeom prst="line">
@@ -2099,8 +1960,8 @@
         </p:nvSpPr>
         <p:spPr>
           <a:xfrm>
-            <a:off x="5733288" y="822960"/>
-            <a:ext cx="1252728" cy="640080"/>
+            <a:off x="5733288" y="765556"/>
+            <a:ext cx="1289304" cy="640080"/>
           </a:xfrm>
           <a:prstGeom prst="rect">
             <a:avLst/>
@@ -2120,6 +1981,28 @@
               <a:buChar char="•"/>
             </a:pPr>
             <a:r>
+              <a:rPr lang="en-US" sz="750" b="1" dirty="0">
+                <a:solidFill>
+                  <a:srgbClr val="4A5568"/>
+                </a:solidFill>
+                <a:latin typeface="Calibri" pitchFamily="34" charset="0"/>
+                <a:ea typeface="Calibri" pitchFamily="34" charset="-122"/>
+                <a:cs typeface="Calibri" pitchFamily="34" charset="-120"/>
+              </a:rPr>
+              <a:t>Lock-in </a:t>
+            </a:r>
+            <a:r>
+              <a:rPr lang="en-US" sz="750" b="1" dirty="0" err="1">
+                <a:solidFill>
+                  <a:srgbClr val="4A5568"/>
+                </a:solidFill>
+                <a:latin typeface="Calibri" pitchFamily="34" charset="0"/>
+                <a:ea typeface="Calibri" pitchFamily="34" charset="-122"/>
+                <a:cs typeface="Calibri" pitchFamily="34" charset="-120"/>
+              </a:rPr>
+              <a:t>tecnológico</a:t>
+            </a:r>
+            <a:r>
               <a:rPr lang="en-US" sz="750" dirty="0">
                 <a:solidFill>
                   <a:srgbClr val="4A5568"/>
@@ -2128,9 +2011,19 @@
                 <a:ea typeface="Calibri" pitchFamily="34" charset="-122"/>
                 <a:cs typeface="Calibri" pitchFamily="34" charset="-120"/>
               </a:rPr>
-              <a:t>Lock-in tecnológico — histórico vinculado ao seguro</a:t>
-            </a:r>
-            <a:endParaRPr lang="en-US" sz="750" dirty="0"/>
+              <a:t> </a:t>
+            </a:r>
+            <a:r>
+              <a:rPr lang="pt-BR" sz="750" dirty="0">
+                <a:solidFill>
+                  <a:srgbClr val="4A5568"/>
+                </a:solidFill>
+                <a:latin typeface="Calibri" pitchFamily="34" charset="0"/>
+                <a:ea typeface="Calibri" pitchFamily="34" charset="-122"/>
+                <a:cs typeface="Calibri" pitchFamily="34" charset="-120"/>
+              </a:rPr>
+              <a:t>Retenção do histórico exigido por seguradoras e órgãos fiscais.</a:t>
+            </a:r>
           </a:p>
           <a:p>
             <a:pPr marL="342900" indent="-342900">
@@ -2141,6 +2034,17 @@
               <a:buChar char="•"/>
             </a:pPr>
             <a:r>
+              <a:rPr lang="en-US" sz="750" dirty="0" err="1">
+                <a:solidFill>
+                  <a:srgbClr val="4A5568"/>
+                </a:solidFill>
+                <a:latin typeface="Calibri" pitchFamily="34" charset="0"/>
+                <a:ea typeface="Calibri" pitchFamily="34" charset="-122"/>
+                <a:cs typeface="Calibri" pitchFamily="34" charset="-120"/>
+              </a:rPr>
+              <a:t>Vínculo</a:t>
+            </a:r>
+            <a:r>
               <a:rPr lang="en-US" sz="750" dirty="0">
                 <a:solidFill>
                   <a:srgbClr val="4A5568"/>
@@ -2149,7 +2053,62 @@
                 <a:ea typeface="Calibri" pitchFamily="34" charset="-122"/>
                 <a:cs typeface="Calibri" pitchFamily="34" charset="-120"/>
               </a:rPr>
-              <a:t>Vínculo consultivo B2B de longo prazo</a:t>
+              <a:t> </a:t>
+            </a:r>
+            <a:r>
+              <a:rPr lang="en-US" sz="750" dirty="0" err="1">
+                <a:solidFill>
+                  <a:srgbClr val="4A5568"/>
+                </a:solidFill>
+                <a:latin typeface="Calibri" pitchFamily="34" charset="0"/>
+                <a:ea typeface="Calibri" pitchFamily="34" charset="-122"/>
+                <a:cs typeface="Calibri" pitchFamily="34" charset="-120"/>
+              </a:rPr>
+              <a:t>consultivo</a:t>
+            </a:r>
+            <a:r>
+              <a:rPr lang="en-US" sz="750" dirty="0">
+                <a:solidFill>
+                  <a:srgbClr val="4A5568"/>
+                </a:solidFill>
+                <a:latin typeface="Calibri" pitchFamily="34" charset="0"/>
+                <a:ea typeface="Calibri" pitchFamily="34" charset="-122"/>
+                <a:cs typeface="Calibri" pitchFamily="34" charset="-120"/>
+              </a:rPr>
+              <a:t> B2B de </a:t>
+            </a:r>
+            <a:r>
+              <a:rPr lang="en-US" sz="750" dirty="0" err="1">
+                <a:solidFill>
+                  <a:srgbClr val="4A5568"/>
+                </a:solidFill>
+                <a:latin typeface="Calibri" pitchFamily="34" charset="0"/>
+                <a:ea typeface="Calibri" pitchFamily="34" charset="-122"/>
+                <a:cs typeface="Calibri" pitchFamily="34" charset="-120"/>
+              </a:rPr>
+              <a:t>longo</a:t>
+            </a:r>
+            <a:r>
+              <a:rPr lang="en-US" sz="750" dirty="0">
+                <a:solidFill>
+                  <a:srgbClr val="4A5568"/>
+                </a:solidFill>
+                <a:latin typeface="Calibri" pitchFamily="34" charset="0"/>
+                <a:ea typeface="Calibri" pitchFamily="34" charset="-122"/>
+                <a:cs typeface="Calibri" pitchFamily="34" charset="-120"/>
+              </a:rPr>
+              <a:t> </a:t>
+            </a:r>
+            <a:r>
+              <a:rPr lang="en-US" sz="750" dirty="0" err="1">
+                <a:solidFill>
+                  <a:srgbClr val="4A5568"/>
+                </a:solidFill>
+                <a:latin typeface="Calibri" pitchFamily="34" charset="0"/>
+                <a:ea typeface="Calibri" pitchFamily="34" charset="-122"/>
+                <a:cs typeface="Calibri" pitchFamily="34" charset="-120"/>
+              </a:rPr>
+              <a:t>prazo</a:t>
             </a:r>
             <a:endParaRPr lang="en-US" sz="750" dirty="0"/>
           </a:p>
@@ -2723,7 +2682,7 @@
         </p:nvSpPr>
         <p:spPr>
           <a:xfrm>
-            <a:off x="128016" y="2834640"/>
+            <a:off x="128016" y="2771140"/>
             <a:ext cx="4325112" cy="0"/>
           </a:xfrm>
           <a:prstGeom prst="line">
@@ -2785,6 +2744,18 @@
               <a:t>Custo Fixo: </a:t>
             </a:r>
             <a:r>
+              <a:rPr lang="en-US" sz="750" dirty="0" err="1">
+                <a:solidFill>
+                  <a:srgbClr val="4A5568"/>
+                </a:solidFill>
+                <a:latin typeface="Calibri" pitchFamily="34" charset="0"/>
+                <a:ea typeface="Calibri" pitchFamily="34" charset="-122"/>
+                <a:cs typeface="Calibri" pitchFamily="34" charset="-120"/>
+                <a:sym typeface="Wingdings" panose="05000000000000000000" pitchFamily="2" charset="2"/>
+              </a:rPr>
+              <a:t>Servidores</a:t>
+            </a:r>
+            <a:r>
               <a:rPr lang="en-US" sz="750" dirty="0">
                 <a:solidFill>
                   <a:srgbClr val="4A5568"/>
@@ -2792,8 +2763,55 @@
                 <a:latin typeface="Calibri" pitchFamily="34" charset="0"/>
                 <a:ea typeface="Calibri" pitchFamily="34" charset="-122"/>
                 <a:cs typeface="Calibri" pitchFamily="34" charset="-120"/>
-              </a:rPr>
-              <a:t>servidores em nuvem e folha de pagamento da equipe</a:t>
+                <a:sym typeface="Wingdings" panose="05000000000000000000" pitchFamily="2" charset="2"/>
+              </a:rPr>
+              <a:t> Cloud, Broker MQTT, </a:t>
+            </a:r>
+            <a:r>
+              <a:rPr lang="en-US" sz="750" dirty="0" err="1">
+                <a:solidFill>
+                  <a:srgbClr val="4A5568"/>
+                </a:solidFill>
+                <a:latin typeface="Calibri" pitchFamily="34" charset="0"/>
+                <a:ea typeface="Calibri" pitchFamily="34" charset="-122"/>
+                <a:cs typeface="Calibri" pitchFamily="34" charset="-120"/>
+                <a:sym typeface="Wingdings" panose="05000000000000000000" pitchFamily="2" charset="2"/>
+              </a:rPr>
+              <a:t>suporte</a:t>
+            </a:r>
+            <a:r>
+              <a:rPr lang="en-US" sz="750" dirty="0">
+                <a:solidFill>
+                  <a:srgbClr val="4A5568"/>
+                </a:solidFill>
+                <a:latin typeface="Calibri" pitchFamily="34" charset="0"/>
+                <a:ea typeface="Calibri" pitchFamily="34" charset="-122"/>
+                <a:cs typeface="Calibri" pitchFamily="34" charset="-120"/>
+                <a:sym typeface="Wingdings" panose="05000000000000000000" pitchFamily="2" charset="2"/>
+              </a:rPr>
+              <a:t> B2B e </a:t>
+            </a:r>
+            <a:r>
+              <a:rPr lang="en-US" sz="750" dirty="0" err="1">
+                <a:solidFill>
+                  <a:srgbClr val="4A5568"/>
+                </a:solidFill>
+                <a:latin typeface="Calibri" pitchFamily="34" charset="0"/>
+                <a:ea typeface="Calibri" pitchFamily="34" charset="-122"/>
+                <a:cs typeface="Calibri" pitchFamily="34" charset="-120"/>
+              </a:rPr>
+              <a:t>folha</a:t>
+            </a:r>
+            <a:r>
+              <a:rPr lang="en-US" sz="750" dirty="0">
+                <a:solidFill>
+                  <a:srgbClr val="4A5568"/>
+                </a:solidFill>
+                <a:latin typeface="Calibri" pitchFamily="34" charset="0"/>
+                <a:ea typeface="Calibri" pitchFamily="34" charset="-122"/>
+                <a:cs typeface="Calibri" pitchFamily="34" charset="-120"/>
+              </a:rPr>
+              <a:t> de pagamento da equipe</a:t>
             </a:r>
             <a:endParaRPr lang="en-US" sz="750" dirty="0"/>
           </a:p>
@@ -2847,8 +2865,40 @@
                 <a:ea typeface="Calibri" pitchFamily="34" charset="-122"/>
                 <a:cs typeface="Calibri" pitchFamily="34" charset="-120"/>
               </a:rPr>
-              <a:t> sensors</a:t>
-            </a:r>
+              <a:t> sensors, </a:t>
+            </a:r>
+            <a:r>
+              <a:rPr lang="en-US" sz="750" dirty="0" err="1">
+                <a:solidFill>
+                  <a:srgbClr val="4A5568"/>
+                </a:solidFill>
+                <a:latin typeface="Calibri" pitchFamily="34" charset="0"/>
+                <a:ea typeface="Calibri" pitchFamily="34" charset="-122"/>
+                <a:cs typeface="Calibri" pitchFamily="34" charset="-120"/>
+                <a:sym typeface="Wingdings" panose="05000000000000000000" pitchFamily="2" charset="2"/>
+              </a:rPr>
+              <a:t>fabricação</a:t>
+            </a:r>
+            <a:r>
+              <a:rPr lang="en-US" sz="750" dirty="0">
+                <a:solidFill>
+                  <a:srgbClr val="4A5568"/>
+                </a:solidFill>
+                <a:latin typeface="Calibri" pitchFamily="34" charset="0"/>
+                <a:ea typeface="Calibri" pitchFamily="34" charset="-122"/>
+                <a:cs typeface="Calibri" pitchFamily="34" charset="-120"/>
+                <a:sym typeface="Wingdings" panose="05000000000000000000" pitchFamily="2" charset="2"/>
+              </a:rPr>
+              <a:t> hardware ~R$ 150,00</a:t>
+            </a:r>
+            <a:endParaRPr lang="en-US" sz="750" dirty="0">
+              <a:solidFill>
+                <a:srgbClr val="4A5568"/>
+              </a:solidFill>
+              <a:latin typeface="Calibri" pitchFamily="34" charset="0"/>
+              <a:ea typeface="Calibri" pitchFamily="34" charset="-122"/>
+              <a:cs typeface="Calibri" pitchFamily="34" charset="-120"/>
+            </a:endParaRPr>
           </a:p>
           <a:p>
             <a:pPr marL="342900" indent="-342900">
@@ -2950,7 +3000,81 @@
               </a:rPr>
               <a:t>inicial</a:t>
             </a:r>
-            <a:endParaRPr lang="en-US" sz="750" dirty="0"/>
+            <a:r>
+              <a:rPr lang="en-US" sz="750" dirty="0">
+                <a:solidFill>
+                  <a:srgbClr val="4A5568"/>
+                </a:solidFill>
+                <a:latin typeface="Calibri" pitchFamily="34" charset="0"/>
+                <a:ea typeface="Calibri" pitchFamily="34" charset="-122"/>
+                <a:cs typeface="Calibri" pitchFamily="34" charset="-120"/>
+                <a:sym typeface="Wingdings" panose="05000000000000000000" pitchFamily="2" charset="2"/>
+              </a:rPr>
+              <a:t> marketing, </a:t>
+            </a:r>
+            <a:r>
+              <a:rPr lang="en-US" sz="750" dirty="0" err="1">
+                <a:solidFill>
+                  <a:srgbClr val="4A5568"/>
+                </a:solidFill>
+                <a:latin typeface="Calibri" pitchFamily="34" charset="0"/>
+                <a:ea typeface="Calibri" pitchFamily="34" charset="-122"/>
+                <a:cs typeface="Calibri" pitchFamily="34" charset="-120"/>
+                <a:sym typeface="Wingdings" panose="05000000000000000000" pitchFamily="2" charset="2"/>
+              </a:rPr>
+              <a:t>licitações</a:t>
+            </a:r>
+            <a:r>
+              <a:rPr lang="en-US" sz="750" dirty="0">
+                <a:solidFill>
+                  <a:srgbClr val="4A5568"/>
+                </a:solidFill>
+                <a:latin typeface="Calibri" pitchFamily="34" charset="0"/>
+                <a:ea typeface="Calibri" pitchFamily="34" charset="-122"/>
+                <a:cs typeface="Calibri" pitchFamily="34" charset="-120"/>
+                <a:sym typeface="Wingdings" panose="05000000000000000000" pitchFamily="2" charset="2"/>
+              </a:rPr>
+              <a:t>, </a:t>
+            </a:r>
+            <a:r>
+              <a:rPr lang="en-US" sz="750" dirty="0" err="1">
+                <a:solidFill>
+                  <a:srgbClr val="4A5568"/>
+                </a:solidFill>
+                <a:latin typeface="Calibri" pitchFamily="34" charset="0"/>
+                <a:ea typeface="Calibri" pitchFamily="34" charset="-122"/>
+                <a:cs typeface="Calibri" pitchFamily="34" charset="-120"/>
+                <a:sym typeface="Wingdings" panose="05000000000000000000" pitchFamily="2" charset="2"/>
+              </a:rPr>
+              <a:t>implantação</a:t>
+            </a:r>
+            <a:endParaRPr lang="en-US" sz="750" dirty="0">
+              <a:solidFill>
+                <a:srgbClr val="4A5568"/>
+              </a:solidFill>
+              <a:latin typeface="Calibri" pitchFamily="34" charset="0"/>
+              <a:ea typeface="Calibri" pitchFamily="34" charset="-122"/>
+              <a:cs typeface="Calibri" pitchFamily="34" charset="-120"/>
+              <a:sym typeface="Wingdings" panose="05000000000000000000" pitchFamily="2" charset="2"/>
+            </a:endParaRPr>
+          </a:p>
+          <a:p>
+            <a:pPr marL="342900" indent="-342900">
+              <a:spcAft>
+                <a:spcPts val="150"/>
+              </a:spcAft>
+              <a:buSzPct val="100000"/>
+              <a:buChar char="•"/>
+            </a:pPr>
+            <a:endParaRPr lang="en-US" sz="750" dirty="0">
+              <a:solidFill>
+                <a:srgbClr val="4A5568"/>
+              </a:solidFill>
+              <a:latin typeface="Calibri" pitchFamily="34" charset="0"/>
+              <a:ea typeface="Calibri" pitchFamily="34" charset="-122"/>
+              <a:cs typeface="Calibri" pitchFamily="34" charset="-120"/>
+              <a:sym typeface="Wingdings" panose="05000000000000000000" pitchFamily="2" charset="2"/>
+            </a:endParaRPr>
           </a:p>
         </p:txBody>
       </p:sp>
@@ -3116,28 +3240,27 @@
               <a:buChar char="•"/>
             </a:pPr>
             <a:r>
-              <a:rPr lang="en-US" sz="750" b="1" dirty="0">
-                <a:solidFill>
-                  <a:srgbClr val="4A5568"/>
-                </a:solidFill>
-                <a:latin typeface="Calibri" pitchFamily="34" charset="0"/>
-                <a:ea typeface="Calibri" pitchFamily="34" charset="-122"/>
-                <a:cs typeface="Calibri" pitchFamily="34" charset="-120"/>
-              </a:rPr>
-              <a:t>Taxa de Setup de Hardware (Dia 0): </a:t>
-            </a:r>
-            <a:r>
-              <a:rPr lang="en-US" sz="750" dirty="0">
-                <a:solidFill>
-                  <a:srgbClr val="4A5568"/>
-                </a:solidFill>
-                <a:latin typeface="Calibri" pitchFamily="34" charset="0"/>
-                <a:ea typeface="Calibri" pitchFamily="34" charset="-122"/>
-                <a:cs typeface="Calibri" pitchFamily="34" charset="-120"/>
-              </a:rPr>
-              <a:t>repasse do custo de fabricação e CAC</a:t>
-            </a:r>
-            <a:endParaRPr lang="en-US" sz="750" dirty="0"/>
+              <a:rPr lang="pt-BR" sz="750" b="1" dirty="0">
+                <a:solidFill>
+                  <a:srgbClr val="4A5568"/>
+                </a:solidFill>
+                <a:latin typeface="Calibri" pitchFamily="34" charset="0"/>
+                <a:ea typeface="Calibri" pitchFamily="34" charset="-122"/>
+                <a:cs typeface="Calibri" pitchFamily="34" charset="-120"/>
+              </a:rPr>
+              <a:t>Taxa de Setup Inicial: </a:t>
+            </a:r>
+            <a:r>
+              <a:rPr lang="pt-BR" sz="750" dirty="0">
+                <a:solidFill>
+                  <a:srgbClr val="4A5568"/>
+                </a:solidFill>
+                <a:latin typeface="Calibri" pitchFamily="34" charset="0"/>
+                <a:ea typeface="Calibri" pitchFamily="34" charset="-122"/>
+                <a:cs typeface="Calibri" pitchFamily="34" charset="-120"/>
+              </a:rPr>
+              <a:t>R$ 550 a R$ 900, protege caixa</a:t>
+            </a:r>
           </a:p>
           <a:p>
             <a:pPr marL="342900" indent="-342900">
@@ -3148,1763 +3271,66 @@
               <a:buChar char="•"/>
             </a:pPr>
             <a:r>
-              <a:rPr lang="en-US" sz="750" b="1" dirty="0" err="1">
-                <a:solidFill>
-                  <a:srgbClr val="4A5568"/>
-                </a:solidFill>
-                <a:latin typeface="Calibri" pitchFamily="34" charset="0"/>
-                <a:ea typeface="Calibri" pitchFamily="34" charset="-122"/>
-                <a:cs typeface="Calibri" pitchFamily="34" charset="-120"/>
-              </a:rPr>
-              <a:t>Receita</a:t>
-            </a:r>
-            <a:r>
-              <a:rPr lang="en-US" sz="750" b="1" dirty="0">
-                <a:solidFill>
-                  <a:srgbClr val="4A5568"/>
-                </a:solidFill>
-                <a:latin typeface="Calibri" pitchFamily="34" charset="0"/>
-                <a:ea typeface="Calibri" pitchFamily="34" charset="-122"/>
-                <a:cs typeface="Calibri" pitchFamily="34" charset="-120"/>
-              </a:rPr>
-              <a:t> </a:t>
-            </a:r>
-            <a:r>
-              <a:rPr lang="en-US" sz="750" b="1" dirty="0" err="1">
-                <a:solidFill>
-                  <a:srgbClr val="4A5568"/>
-                </a:solidFill>
-                <a:latin typeface="Calibri" pitchFamily="34" charset="0"/>
-                <a:ea typeface="Calibri" pitchFamily="34" charset="-122"/>
-                <a:cs typeface="Calibri" pitchFamily="34" charset="-120"/>
-              </a:rPr>
-              <a:t>Recorrente</a:t>
-            </a:r>
-            <a:r>
-              <a:rPr lang="en-US" sz="750" b="1" dirty="0">
-                <a:solidFill>
-                  <a:srgbClr val="4A5568"/>
-                </a:solidFill>
-                <a:latin typeface="Calibri" pitchFamily="34" charset="0"/>
-                <a:ea typeface="Calibri" pitchFamily="34" charset="-122"/>
-                <a:cs typeface="Calibri" pitchFamily="34" charset="-120"/>
-              </a:rPr>
-              <a:t>: </a:t>
-            </a:r>
-            <a:r>
-              <a:rPr lang="en-US" sz="750" dirty="0">
-                <a:solidFill>
-                  <a:srgbClr val="4A5568"/>
-                </a:solidFill>
-                <a:latin typeface="Calibri" pitchFamily="34" charset="0"/>
-                <a:ea typeface="Calibri" pitchFamily="34" charset="-122"/>
-                <a:cs typeface="Calibri" pitchFamily="34" charset="-120"/>
-              </a:rPr>
-              <a:t>mensalidade SaaS escalável</a:t>
-            </a:r>
-            <a:endParaRPr lang="en-US" sz="750" dirty="0"/>
-          </a:p>
-        </p:txBody>
-      </p:sp>
-    </p:spTree>
-  </p:cSld>
-  <p:clrMapOvr>
-    <a:masterClrMapping/>
-  </p:clrMapOvr>
-</p:sld>
-</file>
-
-<file path=ppt/slides/slide2.xml><?xml version="1.0" encoding="utf-8"?>
-<p:sld xmlns:a="http://schemas.openxmlformats.org/drawingml/2006/main" xmlns:r="http://schemas.openxmlformats.org/officeDocument/2006/relationships" xmlns:p="http://schemas.openxmlformats.org/presentationml/2006/main">
-  <p:cSld name="Slide 4">
-    <p:bg>
-      <p:bgPr>
-        <a:solidFill>
-          <a:srgbClr val="F7F8FA"/>
-        </a:solidFill>
-        <a:effectLst/>
-      </p:bgPr>
-    </p:bg>
-    <p:spTree>
-      <p:nvGrpSpPr>
-        <p:cNvPr id="1" name=""/>
-        <p:cNvGrpSpPr/>
-        <p:nvPr/>
-      </p:nvGrpSpPr>
-      <p:grpSpPr>
-        <a:xfrm>
-          <a:off x="0" y="0"/>
-          <a:ext cx="0" cy="0"/>
-          <a:chOff x="0" y="0"/>
-          <a:chExt cx="0" cy="0"/>
-        </a:xfrm>
-      </p:grpSpPr>
-      <p:sp>
-        <p:nvSpPr>
-          <p:cNvPr id="2" name="Shape 0"/>
-          <p:cNvSpPr/>
-          <p:nvPr/>
-        </p:nvSpPr>
-        <p:spPr>
-          <a:xfrm>
-            <a:off x="0" y="0"/>
-            <a:ext cx="9144000" cy="475488"/>
-          </a:xfrm>
-          <a:prstGeom prst="rect">
-            <a:avLst/>
-          </a:prstGeom>
-          <a:solidFill>
-            <a:srgbClr val="1A2B4A"/>
-          </a:solidFill>
-          <a:ln w="12700">
-            <a:solidFill>
-              <a:srgbClr val="1A2B4A"/>
-            </a:solidFill>
-            <a:prstDash val="solid"/>
-          </a:ln>
-        </p:spPr>
-        <p:txBody>
-          <a:bodyPr/>
-          <a:lstStyle/>
-          <a:p>
-            <a:endParaRPr lang="pt-BR"/>
-          </a:p>
-        </p:txBody>
-      </p:sp>
-      <p:sp>
-        <p:nvSpPr>
-          <p:cNvPr id="3" name="Text 1"/>
-          <p:cNvSpPr/>
-          <p:nvPr/>
-        </p:nvSpPr>
-        <p:spPr>
-          <a:xfrm>
-            <a:off x="182880" y="0"/>
-            <a:ext cx="8778240" cy="475488"/>
-          </a:xfrm>
-          <a:prstGeom prst="rect">
-            <a:avLst/>
-          </a:prstGeom>
-          <a:noFill/>
-          <a:ln/>
-        </p:spPr>
-        <p:txBody>
-          <a:bodyPr wrap="square" lIns="0" tIns="0" rIns="0" bIns="0" rtlCol="0" anchor="ctr"/>
-          <a:lstStyle/>
-          <a:p>
-            <a:pPr marL="0" indent="0">
-              <a:buNone/>
+              <a:rPr lang="pt-BR" sz="750" b="1" dirty="0">
+                <a:solidFill>
+                  <a:srgbClr val="4A5568"/>
+                </a:solidFill>
+                <a:latin typeface="Calibri" pitchFamily="34" charset="0"/>
+                <a:ea typeface="Calibri" pitchFamily="34" charset="-122"/>
+                <a:cs typeface="Calibri" pitchFamily="34" charset="-120"/>
+              </a:rPr>
+              <a:t>Mensalidade (SaaS): </a:t>
+            </a:r>
+            <a:r>
+              <a:rPr lang="pt-BR" sz="750" dirty="0">
+                <a:solidFill>
+                  <a:srgbClr val="4A5568"/>
+                </a:solidFill>
+                <a:latin typeface="Calibri" pitchFamily="34" charset="0"/>
+                <a:ea typeface="Calibri" pitchFamily="34" charset="-122"/>
+                <a:cs typeface="Calibri" pitchFamily="34" charset="-120"/>
+              </a:rPr>
+              <a:t>planos escalonados, Básico R$599, Profissional R$1.499, Institucional R$3.499</a:t>
+            </a:r>
+          </a:p>
+          <a:p>
+            <a:pPr marL="342900" indent="-342900">
+              <a:spcAft>
+                <a:spcPts val="150"/>
+              </a:spcAft>
+              <a:buSzPct val="100000"/>
+              <a:buChar char="•"/>
             </a:pPr>
             <a:r>
-              <a:rPr lang="en-US" sz="1300" b="1" dirty="0">
-                <a:solidFill>
-                  <a:srgbClr val="FFFFFF"/>
-                </a:solidFill>
-                <a:latin typeface="Calibri" pitchFamily="34" charset="0"/>
-                <a:ea typeface="Calibri" pitchFamily="34" charset="-122"/>
-                <a:cs typeface="Calibri" pitchFamily="34" charset="-120"/>
-              </a:rPr>
-              <a:t>Modelo de Receita</a:t>
-            </a:r>
-            <a:endParaRPr lang="en-US" sz="1300" dirty="0"/>
-          </a:p>
-        </p:txBody>
-      </p:sp>
-      <p:sp>
-        <p:nvSpPr>
-          <p:cNvPr id="4" name="Shape 2"/>
-          <p:cNvSpPr/>
-          <p:nvPr/>
-        </p:nvSpPr>
-        <p:spPr>
-          <a:xfrm>
-            <a:off x="274320" y="731520"/>
-            <a:ext cx="3931920" cy="3200400"/>
-          </a:xfrm>
-          <a:prstGeom prst="rect">
-            <a:avLst/>
-          </a:prstGeom>
-          <a:solidFill>
-            <a:srgbClr val="FFFFFF"/>
-          </a:solidFill>
-          <a:ln w="12700">
-            <a:solidFill>
-              <a:srgbClr val="CBD5E0"/>
-            </a:solidFill>
-            <a:prstDash val="solid"/>
-          </a:ln>
-        </p:spPr>
-        <p:txBody>
-          <a:bodyPr/>
-          <a:lstStyle/>
-          <a:p>
-            <a:endParaRPr lang="pt-BR"/>
-          </a:p>
-        </p:txBody>
-      </p:sp>
-      <p:sp>
-        <p:nvSpPr>
-          <p:cNvPr id="5" name="Shape 3"/>
-          <p:cNvSpPr/>
-          <p:nvPr/>
-        </p:nvSpPr>
-        <p:spPr>
-          <a:xfrm>
-            <a:off x="274320" y="731520"/>
-            <a:ext cx="3931920" cy="73152"/>
-          </a:xfrm>
-          <a:prstGeom prst="rect">
-            <a:avLst/>
-          </a:prstGeom>
-          <a:solidFill>
-            <a:srgbClr val="1A7A6E"/>
-          </a:solidFill>
-          <a:ln w="12700">
-            <a:solidFill>
-              <a:srgbClr val="1A7A6E"/>
-            </a:solidFill>
-            <a:prstDash val="solid"/>
-          </a:ln>
-        </p:spPr>
-        <p:txBody>
-          <a:bodyPr/>
-          <a:lstStyle/>
-          <a:p>
-            <a:endParaRPr lang="pt-BR"/>
-          </a:p>
-        </p:txBody>
-      </p:sp>
-      <p:sp>
-        <p:nvSpPr>
-          <p:cNvPr id="6" name="Text 4"/>
-          <p:cNvSpPr/>
-          <p:nvPr/>
-        </p:nvSpPr>
-        <p:spPr>
-          <a:xfrm>
-            <a:off x="411480" y="868680"/>
-            <a:ext cx="3657600" cy="411480"/>
-          </a:xfrm>
-          <a:prstGeom prst="rect">
-            <a:avLst/>
-          </a:prstGeom>
-          <a:noFill/>
-          <a:ln/>
-        </p:spPr>
-        <p:txBody>
-          <a:bodyPr wrap="square" lIns="0" tIns="0" rIns="0" bIns="0" rtlCol="0" anchor="ctr"/>
-          <a:lstStyle/>
-          <a:p>
-            <a:pPr marL="0" indent="0">
-              <a:buNone/>
-            </a:pPr>
-            <a:r>
-              <a:rPr lang="en-US" sz="1600" b="1" dirty="0">
-                <a:solidFill>
-                  <a:srgbClr val="1A7A6E"/>
-                </a:solidFill>
-                <a:latin typeface="Calibri" pitchFamily="34" charset="0"/>
-                <a:ea typeface="Calibri" pitchFamily="34" charset="-122"/>
-                <a:cs typeface="Calibri" pitchFamily="34" charset="-120"/>
-              </a:rPr>
-              <a:t>Taxa de Setup</a:t>
-            </a:r>
-            <a:endParaRPr lang="en-US" sz="1600" dirty="0"/>
-          </a:p>
-        </p:txBody>
-      </p:sp>
-      <p:sp>
-        <p:nvSpPr>
-          <p:cNvPr id="7" name="Text 5"/>
-          <p:cNvSpPr/>
-          <p:nvPr/>
-        </p:nvSpPr>
-        <p:spPr>
-          <a:xfrm>
-            <a:off x="411480" y="1325880"/>
-            <a:ext cx="3474720" cy="320040"/>
-          </a:xfrm>
-          <a:prstGeom prst="rect">
-            <a:avLst/>
-          </a:prstGeom>
-          <a:noFill/>
-          <a:ln/>
-        </p:spPr>
-        <p:txBody>
-          <a:bodyPr wrap="square" lIns="0" tIns="0" rIns="0" bIns="0" rtlCol="0" anchor="ctr"/>
-          <a:lstStyle/>
-          <a:p>
-            <a:pPr marL="0" indent="0">
-              <a:buNone/>
-            </a:pPr>
-            <a:r>
-              <a:rPr lang="en-US" sz="1100" dirty="0">
-                <a:solidFill>
-                  <a:srgbClr val="718096"/>
-                </a:solidFill>
-                <a:latin typeface="Calibri" pitchFamily="34" charset="0"/>
-                <a:ea typeface="Calibri" pitchFamily="34" charset="-122"/>
-                <a:cs typeface="Calibri" pitchFamily="34" charset="-120"/>
-              </a:rPr>
-              <a:t>Dia 0</a:t>
-            </a:r>
-            <a:endParaRPr lang="en-US" sz="1100" dirty="0"/>
-          </a:p>
-        </p:txBody>
-      </p:sp>
-      <p:sp>
-        <p:nvSpPr>
-          <p:cNvPr id="8" name="Text 6"/>
-          <p:cNvSpPr/>
-          <p:nvPr/>
-        </p:nvSpPr>
-        <p:spPr>
-          <a:xfrm>
-            <a:off x="411480" y="1737360"/>
-            <a:ext cx="3566160" cy="1645920"/>
-          </a:xfrm>
-          <a:prstGeom prst="rect">
-            <a:avLst/>
-          </a:prstGeom>
-          <a:noFill/>
-          <a:ln/>
-        </p:spPr>
-        <p:txBody>
-          <a:bodyPr wrap="square" lIns="0" tIns="0" rIns="0" bIns="0" rtlCol="0" anchor="t"/>
-          <a:lstStyle/>
-          <a:p>
-            <a:pPr marL="0" indent="0">
-              <a:buNone/>
-            </a:pPr>
-            <a:r>
-              <a:rPr lang="en-US" sz="1150" dirty="0">
-                <a:solidFill>
-                  <a:srgbClr val="4A5568"/>
-                </a:solidFill>
-                <a:latin typeface="Calibri" pitchFamily="34" charset="0"/>
-                <a:ea typeface="Calibri" pitchFamily="34" charset="-122"/>
-                <a:cs typeface="Calibri" pitchFamily="34" charset="-120"/>
-              </a:rPr>
-              <a:t>Repasse direto do custo de fabricação do hardware e do CAC (Custo de Aquisição de Cliente) já no momento da instalação.</a:t>
-            </a:r>
-            <a:endParaRPr lang="en-US" sz="1150" dirty="0"/>
-          </a:p>
-          <a:p>
-            <a:pPr marL="0" indent="0">
-              <a:buNone/>
-            </a:pPr>
-            <a:endParaRPr lang="en-US" sz="1150" dirty="0"/>
-          </a:p>
-          <a:p>
-            <a:pPr marL="0" indent="0">
-              <a:buNone/>
-            </a:pPr>
-            <a:r>
-              <a:rPr lang="en-US" sz="1150" b="1" dirty="0">
-                <a:solidFill>
-                  <a:srgbClr val="4A5568"/>
-                </a:solidFill>
-                <a:latin typeface="Calibri" pitchFamily="34" charset="0"/>
-                <a:ea typeface="Calibri" pitchFamily="34" charset="-122"/>
-                <a:cs typeface="Calibri" pitchFamily="34" charset="-120"/>
-              </a:rPr>
-              <a:t>Benefício: </a:t>
-            </a:r>
-            <a:endParaRPr lang="en-US" sz="1150" dirty="0"/>
-          </a:p>
-          <a:p>
-            <a:pPr marL="0" indent="0">
-              <a:buNone/>
-            </a:pPr>
-            <a:r>
-              <a:rPr lang="en-US" sz="1150" dirty="0">
-                <a:solidFill>
-                  <a:srgbClr val="4A5568"/>
-                </a:solidFill>
-                <a:latin typeface="Calibri" pitchFamily="34" charset="0"/>
-                <a:ea typeface="Calibri" pitchFamily="34" charset="-122"/>
-                <a:cs typeface="Calibri" pitchFamily="34" charset="-120"/>
-              </a:rPr>
-              <a:t>fluxo de caixa positivo desde o primeiro dia.</a:t>
-            </a:r>
-            <a:endParaRPr lang="en-US" sz="1150" dirty="0"/>
-          </a:p>
-        </p:txBody>
-      </p:sp>
-      <p:sp>
-        <p:nvSpPr>
-          <p:cNvPr id="9" name="Shape 7"/>
-          <p:cNvSpPr/>
-          <p:nvPr/>
-        </p:nvSpPr>
-        <p:spPr>
-          <a:xfrm>
-            <a:off x="4937760" y="731520"/>
-            <a:ext cx="3931920" cy="3200400"/>
-          </a:xfrm>
-          <a:prstGeom prst="rect">
-            <a:avLst/>
-          </a:prstGeom>
-          <a:solidFill>
-            <a:srgbClr val="FFFFFF"/>
-          </a:solidFill>
-          <a:ln w="12700">
-            <a:solidFill>
-              <a:srgbClr val="CBD5E0"/>
-            </a:solidFill>
-            <a:prstDash val="solid"/>
-          </a:ln>
-        </p:spPr>
-        <p:txBody>
-          <a:bodyPr/>
-          <a:lstStyle/>
-          <a:p>
-            <a:endParaRPr lang="pt-BR"/>
-          </a:p>
-        </p:txBody>
-      </p:sp>
-      <p:sp>
-        <p:nvSpPr>
-          <p:cNvPr id="10" name="Shape 8"/>
-          <p:cNvSpPr/>
-          <p:nvPr/>
-        </p:nvSpPr>
-        <p:spPr>
-          <a:xfrm>
-            <a:off x="4937760" y="731520"/>
-            <a:ext cx="3931920" cy="73152"/>
-          </a:xfrm>
-          <a:prstGeom prst="rect">
-            <a:avLst/>
-          </a:prstGeom>
-          <a:solidFill>
-            <a:srgbClr val="C8973A"/>
-          </a:solidFill>
-          <a:ln w="12700">
-            <a:solidFill>
-              <a:srgbClr val="C8973A"/>
-            </a:solidFill>
-            <a:prstDash val="solid"/>
-          </a:ln>
-        </p:spPr>
-        <p:txBody>
-          <a:bodyPr/>
-          <a:lstStyle/>
-          <a:p>
-            <a:endParaRPr lang="pt-BR"/>
-          </a:p>
-        </p:txBody>
-      </p:sp>
-      <p:sp>
-        <p:nvSpPr>
-          <p:cNvPr id="11" name="Text 9"/>
-          <p:cNvSpPr/>
-          <p:nvPr/>
-        </p:nvSpPr>
-        <p:spPr>
-          <a:xfrm>
-            <a:off x="5074920" y="868680"/>
-            <a:ext cx="3657600" cy="411480"/>
-          </a:xfrm>
-          <a:prstGeom prst="rect">
-            <a:avLst/>
-          </a:prstGeom>
-          <a:noFill/>
-          <a:ln/>
-        </p:spPr>
-        <p:txBody>
-          <a:bodyPr wrap="square" lIns="0" tIns="0" rIns="0" bIns="0" rtlCol="0" anchor="ctr"/>
-          <a:lstStyle/>
-          <a:p>
-            <a:pPr marL="0" indent="0">
-              <a:buNone/>
-            </a:pPr>
-            <a:r>
-              <a:rPr lang="en-US" sz="1600" b="1" dirty="0">
-                <a:solidFill>
-                  <a:srgbClr val="C8973A"/>
-                </a:solidFill>
-                <a:latin typeface="Calibri" pitchFamily="34" charset="0"/>
-                <a:ea typeface="Calibri" pitchFamily="34" charset="-122"/>
-                <a:cs typeface="Calibri" pitchFamily="34" charset="-120"/>
-              </a:rPr>
-              <a:t>Receita Recorrente SaaS</a:t>
-            </a:r>
-            <a:endParaRPr lang="en-US" sz="1600" dirty="0"/>
-          </a:p>
-        </p:txBody>
-      </p:sp>
-      <p:sp>
-        <p:nvSpPr>
-          <p:cNvPr id="12" name="Text 10"/>
-          <p:cNvSpPr/>
-          <p:nvPr/>
-        </p:nvSpPr>
-        <p:spPr>
-          <a:xfrm>
-            <a:off x="5074920" y="1325880"/>
-            <a:ext cx="3474720" cy="320040"/>
-          </a:xfrm>
-          <a:prstGeom prst="rect">
-            <a:avLst/>
-          </a:prstGeom>
-          <a:noFill/>
-          <a:ln/>
-        </p:spPr>
-        <p:txBody>
-          <a:bodyPr wrap="square" lIns="0" tIns="0" rIns="0" bIns="0" rtlCol="0" anchor="ctr"/>
-          <a:lstStyle/>
-          <a:p>
-            <a:pPr marL="0" indent="0">
-              <a:buNone/>
-            </a:pPr>
-            <a:r>
-              <a:rPr lang="en-US" sz="1100" dirty="0">
-                <a:solidFill>
-                  <a:srgbClr val="718096"/>
-                </a:solidFill>
-                <a:latin typeface="Calibri" pitchFamily="34" charset="0"/>
-                <a:ea typeface="Calibri" pitchFamily="34" charset="-122"/>
-                <a:cs typeface="Calibri" pitchFamily="34" charset="-120"/>
-              </a:rPr>
-              <a:t>Mensal · Escalável</a:t>
-            </a:r>
-            <a:endParaRPr lang="en-US" sz="1100" dirty="0"/>
-          </a:p>
-        </p:txBody>
-      </p:sp>
-      <p:sp>
-        <p:nvSpPr>
-          <p:cNvPr id="13" name="Text 11"/>
-          <p:cNvSpPr/>
-          <p:nvPr/>
-        </p:nvSpPr>
-        <p:spPr>
-          <a:xfrm>
-            <a:off x="5074920" y="1737360"/>
-            <a:ext cx="3566160" cy="1645920"/>
-          </a:xfrm>
-          <a:prstGeom prst="rect">
-            <a:avLst/>
-          </a:prstGeom>
-          <a:noFill/>
-          <a:ln/>
-        </p:spPr>
-        <p:txBody>
-          <a:bodyPr wrap="square" lIns="0" tIns="0" rIns="0" bIns="0" rtlCol="0" anchor="t"/>
-          <a:lstStyle/>
-          <a:p>
-            <a:pPr marL="0" indent="0">
-              <a:buNone/>
-            </a:pPr>
-            <a:r>
-              <a:rPr lang="en-US" sz="1150" dirty="0">
-                <a:solidFill>
-                  <a:srgbClr val="4A5568"/>
-                </a:solidFill>
-                <a:latin typeface="Calibri" pitchFamily="34" charset="0"/>
-                <a:ea typeface="Calibri" pitchFamily="34" charset="-122"/>
-                <a:cs typeface="Calibri" pitchFamily="34" charset="-120"/>
-              </a:rPr>
-              <a:t>Mensalidade SaaS proporcional ao número de pontos de monitoramento e volume de dados armazenados.</a:t>
-            </a:r>
-            <a:endParaRPr lang="en-US" sz="1150" dirty="0"/>
-          </a:p>
-          <a:p>
-            <a:pPr marL="0" indent="0">
-              <a:buNone/>
-            </a:pPr>
-            <a:endParaRPr lang="en-US" sz="1150" dirty="0"/>
-          </a:p>
-          <a:p>
-            <a:pPr marL="0" indent="0">
-              <a:buNone/>
-            </a:pPr>
-            <a:r>
-              <a:rPr lang="en-US" sz="1150" b="1" dirty="0">
-                <a:solidFill>
-                  <a:srgbClr val="4A5568"/>
-                </a:solidFill>
-                <a:latin typeface="Calibri" pitchFamily="34" charset="0"/>
-                <a:ea typeface="Calibri" pitchFamily="34" charset="-122"/>
-                <a:cs typeface="Calibri" pitchFamily="34" charset="-120"/>
-              </a:rPr>
-              <a:t>Lock-in estratégico: </a:t>
-            </a:r>
-            <a:endParaRPr lang="en-US" sz="1150" dirty="0"/>
-          </a:p>
-          <a:p>
-            <a:pPr marL="0" indent="0">
-              <a:buNone/>
-            </a:pPr>
-            <a:r>
-              <a:rPr lang="en-US" sz="1150" dirty="0">
-                <a:solidFill>
-                  <a:srgbClr val="4A5568"/>
-                </a:solidFill>
-                <a:latin typeface="Calibri" pitchFamily="34" charset="0"/>
-                <a:ea typeface="Calibri" pitchFamily="34" charset="-122"/>
-                <a:cs typeface="Calibri" pitchFamily="34" charset="-120"/>
-              </a:rPr>
-              <a:t>o cliente não cancela para preservar o histórico exigido pelo seguro patrimonial.</a:t>
-            </a:r>
-            <a:endParaRPr lang="en-US" sz="1150" dirty="0"/>
-          </a:p>
-        </p:txBody>
-      </p:sp>
-      <p:sp>
-        <p:nvSpPr>
-          <p:cNvPr id="14" name="Shape 12"/>
-          <p:cNvSpPr/>
-          <p:nvPr/>
-        </p:nvSpPr>
-        <p:spPr>
-          <a:xfrm>
-            <a:off x="4224528" y="2331720"/>
-            <a:ext cx="704088" cy="0"/>
-          </a:xfrm>
-          <a:prstGeom prst="line">
-            <a:avLst/>
-          </a:prstGeom>
-          <a:noFill/>
-          <a:ln w="12700">
-            <a:solidFill>
-              <a:srgbClr val="1A2B4A"/>
-            </a:solidFill>
-            <a:prstDash val="solid"/>
-          </a:ln>
-        </p:spPr>
-        <p:txBody>
-          <a:bodyPr/>
-          <a:lstStyle/>
-          <a:p>
-            <a:endParaRPr lang="pt-BR"/>
-          </a:p>
-        </p:txBody>
-      </p:sp>
-      <p:sp>
-        <p:nvSpPr>
-          <p:cNvPr id="15" name="Text 13"/>
-          <p:cNvSpPr/>
-          <p:nvPr/>
-        </p:nvSpPr>
-        <p:spPr>
-          <a:xfrm>
-            <a:off x="4206240" y="2103120"/>
-            <a:ext cx="731520" cy="365760"/>
-          </a:xfrm>
-          <a:prstGeom prst="rect">
-            <a:avLst/>
-          </a:prstGeom>
-          <a:noFill/>
-          <a:ln/>
-        </p:spPr>
-        <p:txBody>
-          <a:bodyPr wrap="square" lIns="0" tIns="0" rIns="0" bIns="0" rtlCol="0" anchor="ctr"/>
-          <a:lstStyle/>
-          <a:p>
-            <a:pPr marL="0" indent="0" algn="ctr">
-              <a:buNone/>
-            </a:pPr>
-            <a:r>
-              <a:rPr lang="en-US" sz="2000" dirty="0">
-                <a:solidFill>
-                  <a:srgbClr val="1A2B4A"/>
-                </a:solidFill>
-                <a:latin typeface="Calibri" pitchFamily="34" charset="0"/>
-                <a:ea typeface="Calibri" pitchFamily="34" charset="-122"/>
-                <a:cs typeface="Calibri" pitchFamily="34" charset="-120"/>
-              </a:rPr>
-              <a:t>→</a:t>
-            </a:r>
-            <a:endParaRPr lang="en-US" sz="2000" dirty="0"/>
-          </a:p>
-        </p:txBody>
-      </p:sp>
-      <p:sp>
-        <p:nvSpPr>
-          <p:cNvPr id="16" name="Shape 14"/>
-          <p:cNvSpPr/>
-          <p:nvPr/>
-        </p:nvSpPr>
-        <p:spPr>
-          <a:xfrm>
-            <a:off x="274320" y="4160520"/>
-            <a:ext cx="8595360" cy="640080"/>
-          </a:xfrm>
-          <a:prstGeom prst="rect">
-            <a:avLst/>
-          </a:prstGeom>
-          <a:solidFill>
-            <a:srgbClr val="EBF8FF"/>
-          </a:solidFill>
-          <a:ln w="12700">
-            <a:solidFill>
-              <a:srgbClr val="BEE3F8"/>
-            </a:solidFill>
-            <a:prstDash val="solid"/>
-          </a:ln>
-        </p:spPr>
-        <p:txBody>
-          <a:bodyPr/>
-          <a:lstStyle/>
-          <a:p>
-            <a:endParaRPr lang="pt-BR"/>
-          </a:p>
-        </p:txBody>
-      </p:sp>
-      <p:sp>
-        <p:nvSpPr>
-          <p:cNvPr id="17" name="Text 15"/>
-          <p:cNvSpPr/>
-          <p:nvPr/>
-        </p:nvSpPr>
-        <p:spPr>
-          <a:xfrm>
-            <a:off x="457200" y="4224528"/>
-            <a:ext cx="8229600" cy="512064"/>
-          </a:xfrm>
-          <a:prstGeom prst="rect">
-            <a:avLst/>
-          </a:prstGeom>
-          <a:noFill/>
-          <a:ln/>
-        </p:spPr>
-        <p:txBody>
-          <a:bodyPr wrap="square" lIns="0" tIns="0" rIns="0" bIns="0" rtlCol="0" anchor="ctr"/>
-          <a:lstStyle/>
-          <a:p>
-            <a:pPr marL="0" indent="0">
-              <a:buNone/>
-            </a:pPr>
-            <a:r>
-              <a:rPr lang="en-US" sz="1050" dirty="0">
-                <a:solidFill>
-                  <a:srgbClr val="2B6CB0"/>
-                </a:solidFill>
-                <a:latin typeface="Calibri" pitchFamily="34" charset="0"/>
-                <a:ea typeface="Calibri" pitchFamily="34" charset="-122"/>
-                <a:cs typeface="Calibri" pitchFamily="34" charset="-120"/>
-              </a:rPr>
-              <a:t>Estrutura de custos: servidores em nuvem e folha de pagamento (fixos) + montagem física dos nós sensores (variável por contrato).</a:t>
-            </a:r>
-            <a:endParaRPr lang="en-US" sz="1050" dirty="0"/>
-          </a:p>
-        </p:txBody>
-      </p:sp>
-    </p:spTree>
-  </p:cSld>
-  <p:clrMapOvr>
-    <a:masterClrMapping/>
-  </p:clrMapOvr>
-</p:sld>
-</file>
-
-<file path=ppt/slides/slide3.xml><?xml version="1.0" encoding="utf-8"?>
-<p:sld xmlns:a="http://schemas.openxmlformats.org/drawingml/2006/main" xmlns:r="http://schemas.openxmlformats.org/officeDocument/2006/relationships" xmlns:p="http://schemas.openxmlformats.org/presentationml/2006/main">
-  <p:cSld name="Slide 5">
-    <p:bg>
-      <p:bgPr>
-        <a:solidFill>
-          <a:srgbClr val="F7F8FA"/>
-        </a:solidFill>
-        <a:effectLst/>
-      </p:bgPr>
-    </p:bg>
-    <p:spTree>
-      <p:nvGrpSpPr>
-        <p:cNvPr id="1" name=""/>
-        <p:cNvGrpSpPr/>
-        <p:nvPr/>
-      </p:nvGrpSpPr>
-      <p:grpSpPr>
-        <a:xfrm>
-          <a:off x="0" y="0"/>
-          <a:ext cx="0" cy="0"/>
-          <a:chOff x="0" y="0"/>
-          <a:chExt cx="0" cy="0"/>
-        </a:xfrm>
-      </p:grpSpPr>
-      <p:sp>
-        <p:nvSpPr>
-          <p:cNvPr id="2" name="Shape 0"/>
-          <p:cNvSpPr/>
-          <p:nvPr/>
-        </p:nvSpPr>
-        <p:spPr>
-          <a:xfrm>
-            <a:off x="0" y="0"/>
-            <a:ext cx="9144000" cy="475488"/>
-          </a:xfrm>
-          <a:prstGeom prst="rect">
-            <a:avLst/>
-          </a:prstGeom>
-          <a:solidFill>
-            <a:srgbClr val="1A2B4A"/>
-          </a:solidFill>
-          <a:ln w="12700">
-            <a:solidFill>
-              <a:srgbClr val="1A2B4A"/>
-            </a:solidFill>
-            <a:prstDash val="solid"/>
-          </a:ln>
-        </p:spPr>
-        <p:txBody>
-          <a:bodyPr/>
-          <a:lstStyle/>
-          <a:p>
-            <a:endParaRPr lang="pt-BR"/>
-          </a:p>
-        </p:txBody>
-      </p:sp>
-      <p:sp>
-        <p:nvSpPr>
-          <p:cNvPr id="3" name="Text 1"/>
-          <p:cNvSpPr/>
-          <p:nvPr/>
-        </p:nvSpPr>
-        <p:spPr>
-          <a:xfrm>
-            <a:off x="182880" y="0"/>
-            <a:ext cx="8778240" cy="475488"/>
-          </a:xfrm>
-          <a:prstGeom prst="rect">
-            <a:avLst/>
-          </a:prstGeom>
-          <a:noFill/>
-          <a:ln/>
-        </p:spPr>
-        <p:txBody>
-          <a:bodyPr wrap="square" lIns="0" tIns="0" rIns="0" bIns="0" rtlCol="0" anchor="ctr"/>
-          <a:lstStyle/>
-          <a:p>
-            <a:pPr marL="0" indent="0">
-              <a:buNone/>
-            </a:pPr>
-            <a:r>
-              <a:rPr lang="en-US" sz="1300" b="1" dirty="0">
-                <a:solidFill>
-                  <a:srgbClr val="FFFFFF"/>
-                </a:solidFill>
-                <a:latin typeface="Calibri" pitchFamily="34" charset="0"/>
-                <a:ea typeface="Calibri" pitchFamily="34" charset="-122"/>
-                <a:cs typeface="Calibri" pitchFamily="34" charset="-120"/>
-              </a:rPr>
-              <a:t>Parcerias-Chave &amp; Go-to-Market</a:t>
-            </a:r>
-            <a:endParaRPr lang="en-US" sz="1300" dirty="0"/>
-          </a:p>
-        </p:txBody>
-      </p:sp>
-      <p:sp>
-        <p:nvSpPr>
-          <p:cNvPr id="4" name="Shape 2"/>
-          <p:cNvSpPr/>
-          <p:nvPr/>
-        </p:nvSpPr>
-        <p:spPr>
-          <a:xfrm>
-            <a:off x="274320" y="658368"/>
-            <a:ext cx="3931920" cy="1078992"/>
-          </a:xfrm>
-          <a:prstGeom prst="rect">
-            <a:avLst/>
-          </a:prstGeom>
-          <a:solidFill>
-            <a:srgbClr val="FFFFFF"/>
-          </a:solidFill>
-          <a:ln w="12700">
-            <a:solidFill>
-              <a:srgbClr val="CBD5E0"/>
-            </a:solidFill>
-            <a:prstDash val="solid"/>
-          </a:ln>
-        </p:spPr>
-        <p:txBody>
-          <a:bodyPr/>
-          <a:lstStyle/>
-          <a:p>
-            <a:endParaRPr lang="pt-BR"/>
-          </a:p>
-        </p:txBody>
-      </p:sp>
-      <p:sp>
-        <p:nvSpPr>
-          <p:cNvPr id="5" name="Shape 3"/>
-          <p:cNvSpPr/>
-          <p:nvPr/>
-        </p:nvSpPr>
-        <p:spPr>
-          <a:xfrm>
-            <a:off x="274320" y="658368"/>
-            <a:ext cx="64008" cy="1078992"/>
-          </a:xfrm>
-          <a:prstGeom prst="rect">
-            <a:avLst/>
-          </a:prstGeom>
-          <a:solidFill>
-            <a:srgbClr val="5B4E8C"/>
-          </a:solidFill>
-          <a:ln w="12700">
-            <a:solidFill>
-              <a:srgbClr val="5B4E8C"/>
-            </a:solidFill>
-            <a:prstDash val="solid"/>
-          </a:ln>
-        </p:spPr>
-        <p:txBody>
-          <a:bodyPr/>
-          <a:lstStyle/>
-          <a:p>
-            <a:endParaRPr lang="pt-BR"/>
-          </a:p>
-        </p:txBody>
-      </p:sp>
-      <p:sp>
-        <p:nvSpPr>
-          <p:cNvPr id="6" name="Text 4"/>
-          <p:cNvSpPr/>
-          <p:nvPr/>
-        </p:nvSpPr>
-        <p:spPr>
-          <a:xfrm>
-            <a:off x="411480" y="731520"/>
-            <a:ext cx="3657600" cy="292608"/>
-          </a:xfrm>
-          <a:prstGeom prst="rect">
-            <a:avLst/>
-          </a:prstGeom>
-          <a:noFill/>
-          <a:ln/>
-        </p:spPr>
-        <p:txBody>
-          <a:bodyPr wrap="square" lIns="0" tIns="0" rIns="0" bIns="0" rtlCol="0" anchor="ctr"/>
-          <a:lstStyle/>
-          <a:p>
-            <a:pPr marL="0" indent="0">
-              <a:buNone/>
-            </a:pPr>
-            <a:r>
-              <a:rPr lang="en-US" sz="1200" b="1" dirty="0">
-                <a:solidFill>
-                  <a:srgbClr val="5B4E8C"/>
-                </a:solidFill>
-                <a:latin typeface="Calibri" pitchFamily="34" charset="0"/>
-                <a:ea typeface="Calibri" pitchFamily="34" charset="-122"/>
-                <a:cs typeface="Calibri" pitchFamily="34" charset="-120"/>
-              </a:rPr>
-              <a:t>Fornecedores de Hardware</a:t>
-            </a:r>
-            <a:endParaRPr lang="en-US" sz="1200" dirty="0"/>
-          </a:p>
-        </p:txBody>
-      </p:sp>
-      <p:sp>
-        <p:nvSpPr>
-          <p:cNvPr id="7" name="Text 5"/>
-          <p:cNvSpPr/>
-          <p:nvPr/>
-        </p:nvSpPr>
-        <p:spPr>
-          <a:xfrm>
-            <a:off x="411480" y="1042416"/>
-            <a:ext cx="3657600" cy="621792"/>
-          </a:xfrm>
-          <a:prstGeom prst="rect">
-            <a:avLst/>
-          </a:prstGeom>
-          <a:noFill/>
-          <a:ln/>
-        </p:spPr>
-        <p:txBody>
-          <a:bodyPr wrap="square" lIns="0" tIns="0" rIns="0" bIns="0" rtlCol="0" anchor="t"/>
-          <a:lstStyle/>
-          <a:p>
-            <a:pPr marL="0" indent="0">
-              <a:buNone/>
-            </a:pPr>
-            <a:r>
-              <a:rPr lang="en-US" sz="1050" dirty="0">
-                <a:solidFill>
-                  <a:srgbClr val="4A5568"/>
-                </a:solidFill>
-                <a:latin typeface="Calibri" pitchFamily="34" charset="0"/>
-                <a:ea typeface="Calibri" pitchFamily="34" charset="-122"/>
-                <a:cs typeface="Calibri" pitchFamily="34" charset="-120"/>
-              </a:rPr>
-              <a:t>Arbitragem de custo na aquisição de componentes. Reduz o custo variável por contrato e amplia a margem de setup.</a:t>
-            </a:r>
-            <a:endParaRPr lang="en-US" sz="1050" dirty="0"/>
-          </a:p>
-        </p:txBody>
-      </p:sp>
-      <p:sp>
-        <p:nvSpPr>
-          <p:cNvPr id="8" name="Shape 6"/>
-          <p:cNvSpPr/>
-          <p:nvPr/>
-        </p:nvSpPr>
-        <p:spPr>
-          <a:xfrm>
-            <a:off x="274320" y="1920240"/>
-            <a:ext cx="3931920" cy="1078992"/>
-          </a:xfrm>
-          <a:prstGeom prst="rect">
-            <a:avLst/>
-          </a:prstGeom>
-          <a:solidFill>
-            <a:srgbClr val="FFFFFF"/>
-          </a:solidFill>
-          <a:ln w="12700">
-            <a:solidFill>
-              <a:srgbClr val="CBD5E0"/>
-            </a:solidFill>
-            <a:prstDash val="solid"/>
-          </a:ln>
-        </p:spPr>
-        <p:txBody>
-          <a:bodyPr/>
-          <a:lstStyle/>
-          <a:p>
-            <a:endParaRPr lang="pt-BR"/>
-          </a:p>
-        </p:txBody>
-      </p:sp>
-      <p:sp>
-        <p:nvSpPr>
-          <p:cNvPr id="9" name="Shape 7"/>
-          <p:cNvSpPr/>
-          <p:nvPr/>
-        </p:nvSpPr>
-        <p:spPr>
-          <a:xfrm>
-            <a:off x="274320" y="1920240"/>
-            <a:ext cx="64008" cy="1078992"/>
-          </a:xfrm>
-          <a:prstGeom prst="rect">
-            <a:avLst/>
-          </a:prstGeom>
-          <a:solidFill>
-            <a:srgbClr val="C0503A"/>
-          </a:solidFill>
-          <a:ln w="12700">
-            <a:solidFill>
-              <a:srgbClr val="C0503A"/>
-            </a:solidFill>
-            <a:prstDash val="solid"/>
-          </a:ln>
-        </p:spPr>
-        <p:txBody>
-          <a:bodyPr/>
-          <a:lstStyle/>
-          <a:p>
-            <a:endParaRPr lang="pt-BR"/>
-          </a:p>
-        </p:txBody>
-      </p:sp>
-      <p:sp>
-        <p:nvSpPr>
-          <p:cNvPr id="10" name="Text 8"/>
-          <p:cNvSpPr/>
-          <p:nvPr/>
-        </p:nvSpPr>
-        <p:spPr>
-          <a:xfrm>
-            <a:off x="411480" y="1993392"/>
-            <a:ext cx="3657600" cy="292608"/>
-          </a:xfrm>
-          <a:prstGeom prst="rect">
-            <a:avLst/>
-          </a:prstGeom>
-          <a:noFill/>
-          <a:ln/>
-        </p:spPr>
-        <p:txBody>
-          <a:bodyPr wrap="square" lIns="0" tIns="0" rIns="0" bIns="0" rtlCol="0" anchor="ctr"/>
-          <a:lstStyle/>
-          <a:p>
-            <a:pPr marL="0" indent="0">
-              <a:buNone/>
-            </a:pPr>
-            <a:r>
-              <a:rPr lang="en-US" sz="1200" b="1" dirty="0">
-                <a:solidFill>
-                  <a:srgbClr val="C0503A"/>
-                </a:solidFill>
-                <a:latin typeface="Calibri" pitchFamily="34" charset="0"/>
-                <a:ea typeface="Calibri" pitchFamily="34" charset="-122"/>
-                <a:cs typeface="Calibri" pitchFamily="34" charset="-120"/>
-              </a:rPr>
-              <a:t>Corretoras de Seguro</a:t>
-            </a:r>
-            <a:endParaRPr lang="en-US" sz="1200" dirty="0"/>
-          </a:p>
-        </p:txBody>
-      </p:sp>
-      <p:sp>
-        <p:nvSpPr>
-          <p:cNvPr id="11" name="Text 9"/>
-          <p:cNvSpPr/>
-          <p:nvPr/>
-        </p:nvSpPr>
-        <p:spPr>
-          <a:xfrm>
-            <a:off x="411480" y="2304288"/>
-            <a:ext cx="3657600" cy="621792"/>
-          </a:xfrm>
-          <a:prstGeom prst="rect">
-            <a:avLst/>
-          </a:prstGeom>
-          <a:noFill/>
-          <a:ln/>
-        </p:spPr>
-        <p:txBody>
-          <a:bodyPr wrap="square" lIns="0" tIns="0" rIns="0" bIns="0" rtlCol="0" anchor="t"/>
-          <a:lstStyle/>
-          <a:p>
-            <a:pPr marL="0" indent="0">
-              <a:buNone/>
-            </a:pPr>
-            <a:r>
-              <a:rPr lang="en-US" sz="1050" dirty="0">
-                <a:solidFill>
-                  <a:srgbClr val="4A5568"/>
-                </a:solidFill>
-                <a:latin typeface="Calibri" pitchFamily="34" charset="0"/>
-                <a:ea typeface="Calibri" pitchFamily="34" charset="-122"/>
-                <a:cs typeface="Calibri" pitchFamily="34" charset="-120"/>
-              </a:rPr>
-              <a:t>Exigem a instalação da Arkanis ou concedem descontos nas apólices. Criam demanda orgânica sem esforço de venda.</a:t>
-            </a:r>
-            <a:endParaRPr lang="en-US" sz="1050" dirty="0"/>
-          </a:p>
-        </p:txBody>
-      </p:sp>
-      <p:sp>
-        <p:nvSpPr>
-          <p:cNvPr id="12" name="Shape 10"/>
-          <p:cNvSpPr/>
-          <p:nvPr/>
-        </p:nvSpPr>
-        <p:spPr>
-          <a:xfrm>
-            <a:off x="274320" y="3182112"/>
-            <a:ext cx="3931920" cy="1078992"/>
-          </a:xfrm>
-          <a:prstGeom prst="rect">
-            <a:avLst/>
-          </a:prstGeom>
-          <a:solidFill>
-            <a:srgbClr val="FFFFFF"/>
-          </a:solidFill>
-          <a:ln w="12700">
-            <a:solidFill>
-              <a:srgbClr val="CBD5E0"/>
-            </a:solidFill>
-            <a:prstDash val="solid"/>
-          </a:ln>
-        </p:spPr>
-        <p:txBody>
-          <a:bodyPr/>
-          <a:lstStyle/>
-          <a:p>
-            <a:endParaRPr lang="pt-BR"/>
-          </a:p>
-        </p:txBody>
-      </p:sp>
-      <p:sp>
-        <p:nvSpPr>
-          <p:cNvPr id="13" name="Shape 11"/>
-          <p:cNvSpPr/>
-          <p:nvPr/>
-        </p:nvSpPr>
-        <p:spPr>
-          <a:xfrm>
-            <a:off x="274320" y="3182112"/>
-            <a:ext cx="64008" cy="1078992"/>
-          </a:xfrm>
-          <a:prstGeom prst="rect">
-            <a:avLst/>
-          </a:prstGeom>
-          <a:solidFill>
-            <a:srgbClr val="1A7A6E"/>
-          </a:solidFill>
-          <a:ln w="12700">
-            <a:solidFill>
-              <a:srgbClr val="1A7A6E"/>
-            </a:solidFill>
-            <a:prstDash val="solid"/>
-          </a:ln>
-        </p:spPr>
-        <p:txBody>
-          <a:bodyPr/>
-          <a:lstStyle/>
-          <a:p>
-            <a:endParaRPr lang="pt-BR"/>
-          </a:p>
-        </p:txBody>
-      </p:sp>
-      <p:sp>
-        <p:nvSpPr>
-          <p:cNvPr id="14" name="Text 12"/>
-          <p:cNvSpPr/>
-          <p:nvPr/>
-        </p:nvSpPr>
-        <p:spPr>
-          <a:xfrm>
-            <a:off x="411480" y="3255264"/>
-            <a:ext cx="3657600" cy="292608"/>
-          </a:xfrm>
-          <a:prstGeom prst="rect">
-            <a:avLst/>
-          </a:prstGeom>
-          <a:noFill/>
-          <a:ln/>
-        </p:spPr>
-        <p:txBody>
-          <a:bodyPr wrap="square" lIns="0" tIns="0" rIns="0" bIns="0" rtlCol="0" anchor="ctr"/>
-          <a:lstStyle/>
-          <a:p>
-            <a:pPr marL="0" indent="0">
-              <a:buNone/>
-            </a:pPr>
-            <a:r>
-              <a:rPr lang="en-US" sz="1200" b="1" dirty="0">
-                <a:solidFill>
-                  <a:srgbClr val="1A7A6E"/>
-                </a:solidFill>
-                <a:latin typeface="Calibri" pitchFamily="34" charset="0"/>
-                <a:ea typeface="Calibri" pitchFamily="34" charset="-122"/>
-                <a:cs typeface="Calibri" pitchFamily="34" charset="-120"/>
-              </a:rPr>
-              <a:t>Universidades / FECAP</a:t>
-            </a:r>
-            <a:endParaRPr lang="en-US" sz="1200" dirty="0"/>
-          </a:p>
-        </p:txBody>
-      </p:sp>
-      <p:sp>
-        <p:nvSpPr>
-          <p:cNvPr id="15" name="Text 13"/>
-          <p:cNvSpPr/>
-          <p:nvPr/>
-        </p:nvSpPr>
-        <p:spPr>
-          <a:xfrm>
-            <a:off x="411480" y="3566160"/>
-            <a:ext cx="3657600" cy="621792"/>
-          </a:xfrm>
-          <a:prstGeom prst="rect">
-            <a:avLst/>
-          </a:prstGeom>
-          <a:noFill/>
-          <a:ln/>
-        </p:spPr>
-        <p:txBody>
-          <a:bodyPr wrap="square" lIns="0" tIns="0" rIns="0" bIns="0" rtlCol="0" anchor="t"/>
-          <a:lstStyle/>
-          <a:p>
-            <a:pPr marL="0" indent="0">
-              <a:buNone/>
-            </a:pPr>
-            <a:r>
-              <a:rPr lang="en-US" sz="1050" dirty="0">
-                <a:solidFill>
-                  <a:srgbClr val="4A5568"/>
-                </a:solidFill>
-                <a:latin typeface="Calibri" pitchFamily="34" charset="0"/>
-                <a:ea typeface="Calibri" pitchFamily="34" charset="-122"/>
-                <a:cs typeface="Calibri" pitchFamily="34" charset="-120"/>
-              </a:rPr>
-              <a:t>Pilotos gratuitos geram prova social, validação acadêmica e confiança junto a órgãos governamentais e licitações.</a:t>
-            </a:r>
-            <a:endParaRPr lang="en-US" sz="1050" dirty="0"/>
-          </a:p>
-        </p:txBody>
-      </p:sp>
-      <p:sp>
-        <p:nvSpPr>
-          <p:cNvPr id="16" name="Text 14"/>
-          <p:cNvSpPr/>
-          <p:nvPr/>
-        </p:nvSpPr>
-        <p:spPr>
-          <a:xfrm>
-            <a:off x="4754880" y="594360"/>
-            <a:ext cx="4114800" cy="320040"/>
-          </a:xfrm>
-          <a:prstGeom prst="rect">
-            <a:avLst/>
-          </a:prstGeom>
-          <a:noFill/>
-          <a:ln/>
-        </p:spPr>
-        <p:txBody>
-          <a:bodyPr wrap="square" lIns="0" tIns="0" rIns="0" bIns="0" rtlCol="0" anchor="ctr"/>
-          <a:lstStyle/>
-          <a:p>
-            <a:pPr marL="0" indent="0">
-              <a:buNone/>
-            </a:pPr>
-            <a:r>
-              <a:rPr lang="en-US" sz="1300" b="1" dirty="0">
-                <a:solidFill>
-                  <a:srgbClr val="1A2B4A"/>
-                </a:solidFill>
-                <a:latin typeface="Calibri" pitchFamily="34" charset="0"/>
-                <a:ea typeface="Calibri" pitchFamily="34" charset="-122"/>
-                <a:cs typeface="Calibri" pitchFamily="34" charset="-120"/>
-              </a:rPr>
-              <a:t>Canais de Distribuição</a:t>
-            </a:r>
-            <a:endParaRPr lang="en-US" sz="1300" dirty="0"/>
-          </a:p>
-        </p:txBody>
-      </p:sp>
-      <p:sp>
-        <p:nvSpPr>
-          <p:cNvPr id="17" name="Shape 15"/>
-          <p:cNvSpPr/>
-          <p:nvPr/>
-        </p:nvSpPr>
-        <p:spPr>
-          <a:xfrm>
-            <a:off x="4754880" y="987552"/>
-            <a:ext cx="4114800" cy="987552"/>
-          </a:xfrm>
-          <a:prstGeom prst="rect">
-            <a:avLst/>
-          </a:prstGeom>
-          <a:solidFill>
-            <a:srgbClr val="FFFFFF"/>
-          </a:solidFill>
-          <a:ln w="12700">
-            <a:solidFill>
-              <a:srgbClr val="CBD5E0"/>
-            </a:solidFill>
-            <a:prstDash val="solid"/>
-          </a:ln>
-        </p:spPr>
-        <p:txBody>
-          <a:bodyPr/>
-          <a:lstStyle/>
-          <a:p>
-            <a:endParaRPr lang="pt-BR"/>
-          </a:p>
-        </p:txBody>
-      </p:sp>
-      <p:sp>
-        <p:nvSpPr>
-          <p:cNvPr id="18" name="Text 16"/>
-          <p:cNvSpPr/>
-          <p:nvPr/>
-        </p:nvSpPr>
-        <p:spPr>
-          <a:xfrm>
-            <a:off x="4800600" y="1060704"/>
-            <a:ext cx="292608" cy="292608"/>
-          </a:xfrm>
-          <a:prstGeom prst="rect">
-            <a:avLst/>
-          </a:prstGeom>
-          <a:noFill/>
-          <a:ln/>
-        </p:spPr>
-        <p:txBody>
-          <a:bodyPr wrap="square" lIns="0" tIns="0" rIns="0" bIns="0" rtlCol="0" anchor="ctr"/>
-          <a:lstStyle/>
-          <a:p>
-            <a:pPr marL="0" indent="0" algn="ctr">
-              <a:buNone/>
-            </a:pPr>
-            <a:r>
-              <a:rPr lang="en-US" sz="1100" b="1" dirty="0">
-                <a:solidFill>
-                  <a:srgbClr val="C8973A"/>
-                </a:solidFill>
-                <a:latin typeface="Calibri" pitchFamily="34" charset="0"/>
-                <a:ea typeface="Calibri" pitchFamily="34" charset="-122"/>
-                <a:cs typeface="Calibri" pitchFamily="34" charset="-120"/>
-              </a:rPr>
-              <a:t>1</a:t>
-            </a:r>
-            <a:endParaRPr lang="en-US" sz="1100" dirty="0"/>
-          </a:p>
-        </p:txBody>
-      </p:sp>
-      <p:sp>
-        <p:nvSpPr>
-          <p:cNvPr id="19" name="Text 17"/>
-          <p:cNvSpPr/>
-          <p:nvPr/>
-        </p:nvSpPr>
-        <p:spPr>
-          <a:xfrm>
-            <a:off x="5138928" y="1060704"/>
-            <a:ext cx="3566160" cy="274320"/>
-          </a:xfrm>
-          <a:prstGeom prst="rect">
-            <a:avLst/>
-          </a:prstGeom>
-          <a:noFill/>
-          <a:ln/>
-        </p:spPr>
-        <p:txBody>
-          <a:bodyPr wrap="square" lIns="0" tIns="0" rIns="0" bIns="0" rtlCol="0" anchor="ctr"/>
-          <a:lstStyle/>
-          <a:p>
-            <a:pPr marL="0" indent="0">
-              <a:buNone/>
-            </a:pPr>
-            <a:r>
-              <a:rPr lang="en-US" sz="1100" b="1" dirty="0">
-                <a:solidFill>
-                  <a:srgbClr val="1A2B4A"/>
-                </a:solidFill>
-                <a:latin typeface="Calibri" pitchFamily="34" charset="0"/>
-                <a:ea typeface="Calibri" pitchFamily="34" charset="-122"/>
-                <a:cs typeface="Calibri" pitchFamily="34" charset="-120"/>
-              </a:rPr>
-              <a:t>Venda Consultiva B2B</a:t>
-            </a:r>
-            <a:endParaRPr lang="en-US" sz="1100" dirty="0"/>
-          </a:p>
-        </p:txBody>
-      </p:sp>
-      <p:sp>
-        <p:nvSpPr>
-          <p:cNvPr id="20" name="Text 18"/>
-          <p:cNvSpPr/>
-          <p:nvPr/>
-        </p:nvSpPr>
-        <p:spPr>
-          <a:xfrm>
-            <a:off x="5138928" y="1371600"/>
-            <a:ext cx="3566160" cy="530352"/>
-          </a:xfrm>
-          <a:prstGeom prst="rect">
-            <a:avLst/>
-          </a:prstGeom>
-          <a:noFill/>
-          <a:ln/>
-        </p:spPr>
-        <p:txBody>
-          <a:bodyPr wrap="square" lIns="0" tIns="0" rIns="0" bIns="0" rtlCol="0" anchor="t"/>
-          <a:lstStyle/>
-          <a:p>
-            <a:pPr marL="0" indent="0">
-              <a:buNone/>
-            </a:pPr>
-            <a:r>
-              <a:rPr lang="en-US" sz="1000" dirty="0">
-                <a:solidFill>
-                  <a:srgbClr val="4A5568"/>
-                </a:solidFill>
-                <a:latin typeface="Calibri" pitchFamily="34" charset="0"/>
-                <a:ea typeface="Calibri" pitchFamily="34" charset="-122"/>
-                <a:cs typeface="Calibri" pitchFamily="34" charset="-120"/>
-              </a:rPr>
-              <a:t>Relacionamento direto com diretores de museus e galerias. Ciclo longo, ticket alto.</a:t>
-            </a:r>
-            <a:endParaRPr lang="en-US" sz="1000" dirty="0"/>
-          </a:p>
-        </p:txBody>
-      </p:sp>
-      <p:sp>
-        <p:nvSpPr>
-          <p:cNvPr id="21" name="Shape 19"/>
-          <p:cNvSpPr/>
-          <p:nvPr/>
-        </p:nvSpPr>
-        <p:spPr>
-          <a:xfrm>
-            <a:off x="4754880" y="2157984"/>
-            <a:ext cx="4114800" cy="987552"/>
-          </a:xfrm>
-          <a:prstGeom prst="rect">
-            <a:avLst/>
-          </a:prstGeom>
-          <a:solidFill>
-            <a:srgbClr val="FFFFFF"/>
-          </a:solidFill>
-          <a:ln w="12700">
-            <a:solidFill>
-              <a:srgbClr val="CBD5E0"/>
-            </a:solidFill>
-            <a:prstDash val="solid"/>
-          </a:ln>
-        </p:spPr>
-        <p:txBody>
-          <a:bodyPr/>
-          <a:lstStyle/>
-          <a:p>
-            <a:endParaRPr lang="pt-BR"/>
-          </a:p>
-        </p:txBody>
-      </p:sp>
-      <p:sp>
-        <p:nvSpPr>
-          <p:cNvPr id="22" name="Text 20"/>
-          <p:cNvSpPr/>
-          <p:nvPr/>
-        </p:nvSpPr>
-        <p:spPr>
-          <a:xfrm>
-            <a:off x="4800600" y="2231136"/>
-            <a:ext cx="292608" cy="292608"/>
-          </a:xfrm>
-          <a:prstGeom prst="rect">
-            <a:avLst/>
-          </a:prstGeom>
-          <a:noFill/>
-          <a:ln/>
-        </p:spPr>
-        <p:txBody>
-          <a:bodyPr wrap="square" lIns="0" tIns="0" rIns="0" bIns="0" rtlCol="0" anchor="ctr"/>
-          <a:lstStyle/>
-          <a:p>
-            <a:pPr marL="0" indent="0" algn="ctr">
-              <a:buNone/>
-            </a:pPr>
-            <a:r>
-              <a:rPr lang="en-US" sz="1100" b="1" dirty="0">
-                <a:solidFill>
-                  <a:srgbClr val="C8973A"/>
-                </a:solidFill>
-                <a:latin typeface="Calibri" pitchFamily="34" charset="0"/>
-                <a:ea typeface="Calibri" pitchFamily="34" charset="-122"/>
-                <a:cs typeface="Calibri" pitchFamily="34" charset="-120"/>
-              </a:rPr>
-              <a:t>2</a:t>
-            </a:r>
-            <a:endParaRPr lang="en-US" sz="1100" dirty="0"/>
-          </a:p>
-        </p:txBody>
-      </p:sp>
-      <p:sp>
-        <p:nvSpPr>
-          <p:cNvPr id="23" name="Text 21"/>
-          <p:cNvSpPr/>
-          <p:nvPr/>
-        </p:nvSpPr>
-        <p:spPr>
-          <a:xfrm>
-            <a:off x="5138928" y="2231136"/>
-            <a:ext cx="3566160" cy="274320"/>
-          </a:xfrm>
-          <a:prstGeom prst="rect">
-            <a:avLst/>
-          </a:prstGeom>
-          <a:noFill/>
-          <a:ln/>
-        </p:spPr>
-        <p:txBody>
-          <a:bodyPr wrap="square" lIns="0" tIns="0" rIns="0" bIns="0" rtlCol="0" anchor="ctr"/>
-          <a:lstStyle/>
-          <a:p>
-            <a:pPr marL="0" indent="0">
-              <a:buNone/>
-            </a:pPr>
-            <a:r>
-              <a:rPr lang="en-US" sz="1100" b="1" dirty="0">
-                <a:solidFill>
-                  <a:srgbClr val="1A2B4A"/>
-                </a:solidFill>
-                <a:latin typeface="Calibri" pitchFamily="34" charset="0"/>
-                <a:ea typeface="Calibri" pitchFamily="34" charset="-122"/>
-                <a:cs typeface="Calibri" pitchFamily="34" charset="-120"/>
-              </a:rPr>
-              <a:t>Licitações Públicas (B2G)</a:t>
-            </a:r>
-            <a:endParaRPr lang="en-US" sz="1100" dirty="0"/>
-          </a:p>
-        </p:txBody>
-      </p:sp>
-      <p:sp>
-        <p:nvSpPr>
-          <p:cNvPr id="24" name="Text 22"/>
-          <p:cNvSpPr/>
-          <p:nvPr/>
-        </p:nvSpPr>
-        <p:spPr>
-          <a:xfrm>
-            <a:off x="5138928" y="2542032"/>
-            <a:ext cx="3566160" cy="530352"/>
-          </a:xfrm>
-          <a:prstGeom prst="rect">
-            <a:avLst/>
-          </a:prstGeom>
-          <a:noFill/>
-          <a:ln/>
-        </p:spPr>
-        <p:txBody>
-          <a:bodyPr wrap="square" lIns="0" tIns="0" rIns="0" bIns="0" rtlCol="0" anchor="t"/>
-          <a:lstStyle/>
-          <a:p>
-            <a:pPr marL="0" indent="0">
-              <a:buNone/>
-            </a:pPr>
-            <a:r>
-              <a:rPr lang="en-US" sz="1000" dirty="0">
-                <a:solidFill>
-                  <a:srgbClr val="4A5568"/>
-                </a:solidFill>
-                <a:latin typeface="Calibri" pitchFamily="34" charset="0"/>
-                <a:ea typeface="Calibri" pitchFamily="34" charset="-122"/>
-                <a:cs typeface="Calibri" pitchFamily="34" charset="-120"/>
-              </a:rPr>
-              <a:t>Foco em arquivos históricos e museus estatais. Exige certificação e laudos auditáveis.</a:t>
-            </a:r>
-            <a:endParaRPr lang="en-US" sz="1000" dirty="0"/>
-          </a:p>
-        </p:txBody>
-      </p:sp>
-      <p:sp>
-        <p:nvSpPr>
-          <p:cNvPr id="25" name="Shape 23"/>
-          <p:cNvSpPr/>
-          <p:nvPr/>
-        </p:nvSpPr>
-        <p:spPr>
-          <a:xfrm>
-            <a:off x="4754880" y="3328416"/>
-            <a:ext cx="4114800" cy="987552"/>
-          </a:xfrm>
-          <a:prstGeom prst="rect">
-            <a:avLst/>
-          </a:prstGeom>
-          <a:solidFill>
-            <a:srgbClr val="FFFFFF"/>
-          </a:solidFill>
-          <a:ln w="12700">
-            <a:solidFill>
-              <a:srgbClr val="CBD5E0"/>
-            </a:solidFill>
-            <a:prstDash val="solid"/>
-          </a:ln>
-        </p:spPr>
-        <p:txBody>
-          <a:bodyPr/>
-          <a:lstStyle/>
-          <a:p>
-            <a:endParaRPr lang="pt-BR"/>
-          </a:p>
-        </p:txBody>
-      </p:sp>
-      <p:sp>
-        <p:nvSpPr>
-          <p:cNvPr id="26" name="Text 24"/>
-          <p:cNvSpPr/>
-          <p:nvPr/>
-        </p:nvSpPr>
-        <p:spPr>
-          <a:xfrm>
-            <a:off x="4800600" y="3401568"/>
-            <a:ext cx="292608" cy="292608"/>
-          </a:xfrm>
-          <a:prstGeom prst="rect">
-            <a:avLst/>
-          </a:prstGeom>
-          <a:noFill/>
-          <a:ln/>
-        </p:spPr>
-        <p:txBody>
-          <a:bodyPr wrap="square" lIns="0" tIns="0" rIns="0" bIns="0" rtlCol="0" anchor="ctr"/>
-          <a:lstStyle/>
-          <a:p>
-            <a:pPr marL="0" indent="0" algn="ctr">
-              <a:buNone/>
-            </a:pPr>
-            <a:r>
-              <a:rPr lang="en-US" sz="1100" b="1" dirty="0">
-                <a:solidFill>
-                  <a:srgbClr val="C8973A"/>
-                </a:solidFill>
-                <a:latin typeface="Calibri" pitchFamily="34" charset="0"/>
-                <a:ea typeface="Calibri" pitchFamily="34" charset="-122"/>
-                <a:cs typeface="Calibri" pitchFamily="34" charset="-120"/>
-              </a:rPr>
-              <a:t>3</a:t>
-            </a:r>
-            <a:endParaRPr lang="en-US" sz="1100" dirty="0"/>
-          </a:p>
-        </p:txBody>
-      </p:sp>
-      <p:sp>
-        <p:nvSpPr>
-          <p:cNvPr id="27" name="Text 25"/>
-          <p:cNvSpPr/>
-          <p:nvPr/>
-        </p:nvSpPr>
-        <p:spPr>
-          <a:xfrm>
-            <a:off x="5138928" y="3401568"/>
-            <a:ext cx="3566160" cy="274320"/>
-          </a:xfrm>
-          <a:prstGeom prst="rect">
-            <a:avLst/>
-          </a:prstGeom>
-          <a:noFill/>
-          <a:ln/>
-        </p:spPr>
-        <p:txBody>
-          <a:bodyPr wrap="square" lIns="0" tIns="0" rIns="0" bIns="0" rtlCol="0" anchor="ctr"/>
-          <a:lstStyle/>
-          <a:p>
-            <a:pPr marL="0" indent="0">
-              <a:buNone/>
-            </a:pPr>
-            <a:r>
-              <a:rPr lang="en-US" sz="1100" b="1" dirty="0">
-                <a:solidFill>
-                  <a:srgbClr val="1A2B4A"/>
-                </a:solidFill>
-                <a:latin typeface="Calibri" pitchFamily="34" charset="0"/>
-                <a:ea typeface="Calibri" pitchFamily="34" charset="-122"/>
-                <a:cs typeface="Calibri" pitchFamily="34" charset="-120"/>
-              </a:rPr>
-              <a:t>Feiras de Museologia</a:t>
-            </a:r>
-            <a:endParaRPr lang="en-US" sz="1100" dirty="0"/>
-          </a:p>
-        </p:txBody>
-      </p:sp>
-      <p:sp>
-        <p:nvSpPr>
-          <p:cNvPr id="28" name="Text 26"/>
-          <p:cNvSpPr/>
-          <p:nvPr/>
-        </p:nvSpPr>
-        <p:spPr>
-          <a:xfrm>
-            <a:off x="5138928" y="3712464"/>
-            <a:ext cx="3566160" cy="530352"/>
-          </a:xfrm>
-          <a:prstGeom prst="rect">
-            <a:avLst/>
-          </a:prstGeom>
-          <a:noFill/>
-          <a:ln/>
-        </p:spPr>
-        <p:txBody>
-          <a:bodyPr wrap="square" lIns="0" tIns="0" rIns="0" bIns="0" rtlCol="0" anchor="t"/>
-          <a:lstStyle/>
-          <a:p>
-            <a:pPr marL="0" indent="0">
-              <a:buNone/>
-            </a:pPr>
-            <a:r>
-              <a:rPr lang="en-US" sz="1000" dirty="0">
-                <a:solidFill>
-                  <a:srgbClr val="4A5568"/>
-                </a:solidFill>
-                <a:latin typeface="Calibri" pitchFamily="34" charset="0"/>
-                <a:ea typeface="Calibri" pitchFamily="34" charset="-122"/>
-                <a:cs typeface="Calibri" pitchFamily="34" charset="-120"/>
-              </a:rPr>
-              <a:t>Exposição qualificada via parcerias. Reduz CAC e constrói autoridade de marca.</a:t>
-            </a:r>
-            <a:endParaRPr lang="en-US" sz="1000" dirty="0"/>
+              <a:rPr lang="pt-BR" sz="750" b="1" dirty="0">
+                <a:solidFill>
+                  <a:srgbClr val="4A5568"/>
+                </a:solidFill>
+                <a:latin typeface="Calibri" pitchFamily="34" charset="0"/>
+                <a:ea typeface="Calibri" pitchFamily="34" charset="-122"/>
+                <a:cs typeface="Calibri" pitchFamily="34" charset="-120"/>
+              </a:rPr>
+              <a:t>Natureza da Receita: </a:t>
+            </a:r>
+            <a:r>
+              <a:rPr lang="pt-BR" sz="750" dirty="0">
+                <a:solidFill>
+                  <a:srgbClr val="4A5568"/>
+                </a:solidFill>
+                <a:latin typeface="Calibri" pitchFamily="34" charset="0"/>
+                <a:ea typeface="Calibri" pitchFamily="34" charset="-122"/>
+                <a:cs typeface="Calibri" pitchFamily="34" charset="-120"/>
+              </a:rPr>
+              <a:t>previsível, recorrente, margem crescente</a:t>
+            </a:r>
+            <a:endParaRPr lang="en-US" sz="750" dirty="0">
+              <a:solidFill>
+                <a:srgbClr val="4A5568"/>
+              </a:solidFill>
+              <a:latin typeface="Calibri" pitchFamily="34" charset="0"/>
+              <a:ea typeface="Calibri" pitchFamily="34" charset="-122"/>
+              <a:cs typeface="Calibri" pitchFamily="34" charset="-120"/>
+            </a:endParaRPr>
           </a:p>
         </p:txBody>
       </p:sp>
